--- a/XD_JIG/XD12/XD12R_GT1009A0R0/Docs/GT/GT1009A0R0_XDIC12R_Trimming_260120.pptx
+++ b/XD_JIG/XD12/XD12R_GT1009A0R0/Docs/GT/GT1009A0R0_XDIC12R_Trimming_260120.pptx
@@ -5,10 +5,10 @@
     <p:sldMasterId id="2147483648" r:id="rId1"/>
   </p:sldMasterIdLst>
   <p:notesMasterIdLst>
-    <p:notesMasterId r:id="rId15"/>
+    <p:notesMasterId r:id="rId17"/>
   </p:notesMasterIdLst>
   <p:handoutMasterIdLst>
-    <p:handoutMasterId r:id="rId16"/>
+    <p:handoutMasterId r:id="rId18"/>
   </p:handoutMasterIdLst>
   <p:sldIdLst>
     <p:sldId id="256" r:id="rId2"/>
@@ -18,12 +18,14 @@
     <p:sldId id="538" r:id="rId6"/>
     <p:sldId id="561" r:id="rId7"/>
     <p:sldId id="560" r:id="rId8"/>
-    <p:sldId id="550" r:id="rId9"/>
-    <p:sldId id="535" r:id="rId10"/>
-    <p:sldId id="552" r:id="rId11"/>
-    <p:sldId id="553" r:id="rId12"/>
-    <p:sldId id="547" r:id="rId13"/>
-    <p:sldId id="551" r:id="rId14"/>
+    <p:sldId id="562" r:id="rId9"/>
+    <p:sldId id="563" r:id="rId10"/>
+    <p:sldId id="550" r:id="rId11"/>
+    <p:sldId id="535" r:id="rId12"/>
+    <p:sldId id="552" r:id="rId13"/>
+    <p:sldId id="553" r:id="rId14"/>
+    <p:sldId id="547" r:id="rId15"/>
+    <p:sldId id="551" r:id="rId16"/>
   </p:sldIdLst>
   <p:sldSz cx="12192000" cy="6858000"/>
   <p:notesSz cx="9144000" cy="6858000"/>
@@ -138,6 +140,8 @@
             <p14:sldId id="538"/>
             <p14:sldId id="561"/>
             <p14:sldId id="560"/>
+            <p14:sldId id="562"/>
+            <p14:sldId id="563"/>
             <p14:sldId id="550"/>
             <p14:sldId id="535"/>
             <p14:sldId id="552"/>
@@ -263,7 +267,7 @@
           <a:p>
             <a:fld id="{30000FE8-DA16-4310-A798-C8BB96DEB633}" type="datetimeFigureOut">
               <a:rPr lang="ko-KR" altLang="en-US" smtClean="0"/>
-              <a:t>2026-01-20</a:t>
+              <a:t>2026-02-05</a:t>
             </a:fld>
             <a:endParaRPr lang="ko-KR" altLang="en-US"/>
           </a:p>
@@ -441,7 +445,7 @@
           <a:p>
             <a:fld id="{5D86A34C-D423-4D55-BB20-4205E9FE39FE}" type="datetimeFigureOut">
               <a:rPr lang="ko-KR" altLang="en-US" smtClean="0"/>
-              <a:t>2026-01-20</a:t>
+              <a:t>2026-02-05</a:t>
             </a:fld>
             <a:endParaRPr lang="ko-KR" altLang="en-US"/>
           </a:p>
@@ -753,6 +757,13 @@
           </p:nvPr>
         </p:nvSpPr>
         <p:spPr/>
+        <p:txBody>
+          <a:bodyPr/>
+          <a:lstStyle/>
+          <a:p>
+            <a:endParaRPr lang="ko-KR" altLang="en-US"/>
+          </a:p>
+        </p:txBody>
       </p:sp>
       <p:sp>
         <p:nvSpPr>
@@ -814,6 +825,13 @@
           </p:nvPr>
         </p:nvSpPr>
         <p:spPr/>
+        <p:txBody>
+          <a:bodyPr/>
+          <a:lstStyle/>
+          <a:p>
+            <a:endParaRPr lang="ko-KR" altLang="en-US"/>
+          </a:p>
+        </p:txBody>
       </p:sp>
       <p:sp>
         <p:nvSpPr>
@@ -4541,6 +4559,1622 @@
         <p:cNvPr id="1" name="">
           <a:extLst>
             <a:ext uri="{FF2B5EF4-FFF2-40B4-BE49-F238E27FC236}">
+              <a16:creationId xmlns:a16="http://schemas.microsoft.com/office/drawing/2014/main" id="{C114B90A-1680-386D-0CBD-F2A32E2AC307}"/>
+            </a:ext>
+          </a:extLst>
+        </p:cNvPr>
+        <p:cNvGrpSpPr/>
+        <p:nvPr/>
+      </p:nvGrpSpPr>
+      <p:grpSpPr>
+        <a:xfrm>
+          <a:off x="0" y="0"/>
+          <a:ext cx="0" cy="0"/>
+          <a:chOff x="0" y="0"/>
+          <a:chExt cx="0" cy="0"/>
+        </a:xfrm>
+      </p:grpSpPr>
+      <p:sp>
+        <p:nvSpPr>
+          <p:cNvPr id="11" name="TextBox 10">
+            <a:extLst>
+              <a:ext uri="{FF2B5EF4-FFF2-40B4-BE49-F238E27FC236}">
+                <a16:creationId xmlns:a16="http://schemas.microsoft.com/office/drawing/2014/main" id="{D667DCAA-308B-2430-64B8-D503B37D88A5}"/>
+              </a:ext>
+            </a:extLst>
+          </p:cNvPr>
+          <p:cNvSpPr txBox="1"/>
+          <p:nvPr/>
+        </p:nvSpPr>
+        <p:spPr>
+          <a:xfrm>
+            <a:off x="274320" y="506306"/>
+            <a:ext cx="3846196" cy="369332"/>
+          </a:xfrm>
+          <a:prstGeom prst="rect">
+            <a:avLst/>
+          </a:prstGeom>
+          <a:noFill/>
+        </p:spPr>
+        <p:txBody>
+          <a:bodyPr wrap="square" rtlCol="0">
+            <a:spAutoFit/>
+          </a:bodyPr>
+          <a:lstStyle/>
+          <a:p>
+            <a:r>
+              <a:rPr lang="en-US" altLang="ko-KR" dirty="0"/>
+              <a:t>Trimming Sequence</a:t>
+            </a:r>
+            <a:endParaRPr lang="ko-KR" altLang="en-US" dirty="0"/>
+          </a:p>
+        </p:txBody>
+      </p:sp>
+      <p:sp>
+        <p:nvSpPr>
+          <p:cNvPr id="18" name="슬라이드 번호 개체 틀 17">
+            <a:extLst>
+              <a:ext uri="{FF2B5EF4-FFF2-40B4-BE49-F238E27FC236}">
+                <a16:creationId xmlns:a16="http://schemas.microsoft.com/office/drawing/2014/main" id="{334BF372-9BBA-6ED9-D2BC-2E525BDE1AB1}"/>
+              </a:ext>
+            </a:extLst>
+          </p:cNvPr>
+          <p:cNvSpPr>
+            <a:spLocks noGrp="1"/>
+          </p:cNvSpPr>
+          <p:nvPr>
+            <p:ph type="sldNum" sz="quarter" idx="4"/>
+          </p:nvPr>
+        </p:nvSpPr>
+        <p:spPr/>
+        <p:txBody>
+          <a:bodyPr/>
+          <a:lstStyle/>
+          <a:p>
+            <a:fld id="{83D7C3DD-38B7-4D6D-B394-0849C77A12EC}" type="slidenum">
+              <a:rPr lang="en-US" smtClean="0"/>
+              <a:pPr/>
+              <a:t>10</a:t>
+            </a:fld>
+            <a:endParaRPr lang="en-US" dirty="0"/>
+          </a:p>
+        </p:txBody>
+      </p:sp>
+      <p:grpSp>
+        <p:nvGrpSpPr>
+          <p:cNvPr id="5" name="그룹 4">
+            <a:extLst>
+              <a:ext uri="{FF2B5EF4-FFF2-40B4-BE49-F238E27FC236}">
+                <a16:creationId xmlns:a16="http://schemas.microsoft.com/office/drawing/2014/main" id="{6E28F537-4ABB-7CF3-CF6D-030937389FAD}"/>
+              </a:ext>
+            </a:extLst>
+          </p:cNvPr>
+          <p:cNvGrpSpPr/>
+          <p:nvPr/>
+        </p:nvGrpSpPr>
+        <p:grpSpPr>
+          <a:xfrm>
+            <a:off x="329565" y="849671"/>
+            <a:ext cx="10595610" cy="5502023"/>
+            <a:chOff x="329565" y="849671"/>
+            <a:chExt cx="11532870" cy="5502023"/>
+          </a:xfrm>
+        </p:grpSpPr>
+        <p:pic>
+          <p:nvPicPr>
+            <p:cNvPr id="3" name="그림 2" descr="텍스트, 스크린샷, 번호, 평행이(가) 표시된 사진&#10;&#10;AI 생성 콘텐츠는 정확하지 않을 수 있습니다.">
+              <a:extLst>
+                <a:ext uri="{FF2B5EF4-FFF2-40B4-BE49-F238E27FC236}">
+                  <a16:creationId xmlns:a16="http://schemas.microsoft.com/office/drawing/2014/main" id="{62E483F5-D3FF-7963-BE09-CCDB7711BB4A}"/>
+                </a:ext>
+              </a:extLst>
+            </p:cNvPr>
+            <p:cNvPicPr>
+              <a:picLocks noChangeAspect="1"/>
+            </p:cNvPicPr>
+            <p:nvPr/>
+          </p:nvPicPr>
+          <p:blipFill>
+            <a:blip r:embed="rId3"/>
+            <a:stretch>
+              <a:fillRect/>
+            </a:stretch>
+          </p:blipFill>
+          <p:spPr>
+            <a:xfrm>
+              <a:off x="329565" y="849671"/>
+              <a:ext cx="11532870" cy="5502023"/>
+            </a:xfrm>
+            <a:prstGeom prst="rect">
+              <a:avLst/>
+            </a:prstGeom>
+          </p:spPr>
+        </p:pic>
+        <p:sp>
+          <p:nvSpPr>
+            <p:cNvPr id="2" name="TextBox 1">
+              <a:extLst>
+                <a:ext uri="{FF2B5EF4-FFF2-40B4-BE49-F238E27FC236}">
+                  <a16:creationId xmlns:a16="http://schemas.microsoft.com/office/drawing/2014/main" id="{36A1965B-383C-1548-3223-84F85CD1BDFB}"/>
+                </a:ext>
+              </a:extLst>
+            </p:cNvPr>
+            <p:cNvSpPr txBox="1"/>
+            <p:nvPr/>
+          </p:nvSpPr>
+          <p:spPr>
+            <a:xfrm>
+              <a:off x="10386394" y="1559240"/>
+              <a:ext cx="1351548" cy="246221"/>
+            </a:xfrm>
+            <a:prstGeom prst="rect">
+              <a:avLst/>
+            </a:prstGeom>
+            <a:noFill/>
+          </p:spPr>
+          <p:txBody>
+            <a:bodyPr wrap="square" rtlCol="0">
+              <a:spAutoFit/>
+            </a:bodyPr>
+            <a:lstStyle/>
+            <a:p>
+              <a:r>
+                <a:rPr lang="en-US" altLang="ko-KR" sz="1000" b="1" dirty="0">
+                  <a:solidFill>
+                    <a:srgbClr val="0000FF"/>
+                  </a:solidFill>
+                </a:rPr>
+                <a:t>**signed binary**</a:t>
+              </a:r>
+              <a:endParaRPr lang="ko-KR" altLang="en-US" sz="1000" b="1" dirty="0">
+                <a:solidFill>
+                  <a:srgbClr val="0000FF"/>
+                </a:solidFill>
+              </a:endParaRPr>
+            </a:p>
+          </p:txBody>
+        </p:sp>
+        <p:sp>
+          <p:nvSpPr>
+            <p:cNvPr id="4" name="TextBox 3">
+              <a:extLst>
+                <a:ext uri="{FF2B5EF4-FFF2-40B4-BE49-F238E27FC236}">
+                  <a16:creationId xmlns:a16="http://schemas.microsoft.com/office/drawing/2014/main" id="{7A860B47-43A0-8F15-62BE-2196D3377AF2}"/>
+                </a:ext>
+              </a:extLst>
+            </p:cNvPr>
+            <p:cNvSpPr txBox="1"/>
+            <p:nvPr/>
+          </p:nvSpPr>
+          <p:spPr>
+            <a:xfrm>
+              <a:off x="10386394" y="2039855"/>
+              <a:ext cx="1351548" cy="246221"/>
+            </a:xfrm>
+            <a:prstGeom prst="rect">
+              <a:avLst/>
+            </a:prstGeom>
+            <a:noFill/>
+          </p:spPr>
+          <p:txBody>
+            <a:bodyPr wrap="square" rtlCol="0">
+              <a:spAutoFit/>
+            </a:bodyPr>
+            <a:lstStyle/>
+            <a:p>
+              <a:r>
+                <a:rPr lang="en-US" altLang="ko-KR" sz="1000" b="1" dirty="0">
+                  <a:solidFill>
+                    <a:srgbClr val="0000FF"/>
+                  </a:solidFill>
+                </a:rPr>
+                <a:t>**signed binary**</a:t>
+              </a:r>
+              <a:endParaRPr lang="ko-KR" altLang="en-US" sz="1000" b="1" dirty="0">
+                <a:solidFill>
+                  <a:srgbClr val="0000FF"/>
+                </a:solidFill>
+              </a:endParaRPr>
+            </a:p>
+          </p:txBody>
+        </p:sp>
+      </p:grpSp>
+      <p:pic>
+        <p:nvPicPr>
+          <p:cNvPr id="9" name="그림 8">
+            <a:extLst>
+              <a:ext uri="{FF2B5EF4-FFF2-40B4-BE49-F238E27FC236}">
+                <a16:creationId xmlns:a16="http://schemas.microsoft.com/office/drawing/2014/main" id="{DA0B8689-7E8F-BEE8-365E-55A0FCC0F06B}"/>
+              </a:ext>
+            </a:extLst>
+          </p:cNvPr>
+          <p:cNvPicPr>
+            <a:picLocks noChangeAspect="1"/>
+          </p:cNvPicPr>
+          <p:nvPr/>
+        </p:nvPicPr>
+        <p:blipFill>
+          <a:blip r:embed="rId4"/>
+          <a:stretch>
+            <a:fillRect/>
+          </a:stretch>
+        </p:blipFill>
+        <p:spPr>
+          <a:xfrm>
+            <a:off x="2960496" y="574731"/>
+            <a:ext cx="7867400" cy="175673"/>
+          </a:xfrm>
+          <a:prstGeom prst="rect">
+            <a:avLst/>
+          </a:prstGeom>
+        </p:spPr>
+      </p:pic>
+      <p:cxnSp>
+        <p:nvCxnSpPr>
+          <p:cNvPr id="12" name="직선 화살표 연결선 11">
+            <a:extLst>
+              <a:ext uri="{FF2B5EF4-FFF2-40B4-BE49-F238E27FC236}">
+                <a16:creationId xmlns:a16="http://schemas.microsoft.com/office/drawing/2014/main" id="{414ADA60-0A8A-3B3B-BB7E-315ACAF16D5A}"/>
+              </a:ext>
+            </a:extLst>
+          </p:cNvPr>
+          <p:cNvCxnSpPr>
+            <a:cxnSpLocks/>
+          </p:cNvCxnSpPr>
+          <p:nvPr/>
+        </p:nvCxnSpPr>
+        <p:spPr>
+          <a:xfrm flipH="1">
+            <a:off x="7618343" y="323022"/>
+            <a:ext cx="318053" cy="251709"/>
+          </a:xfrm>
+          <a:prstGeom prst="straightConnector1">
+            <a:avLst/>
+          </a:prstGeom>
+          <a:ln>
+            <a:tailEnd type="triangle"/>
+          </a:ln>
+        </p:spPr>
+        <p:style>
+          <a:lnRef idx="2">
+            <a:schemeClr val="accent1"/>
+          </a:lnRef>
+          <a:fillRef idx="0">
+            <a:schemeClr val="accent1"/>
+          </a:fillRef>
+          <a:effectRef idx="1">
+            <a:schemeClr val="accent1"/>
+          </a:effectRef>
+          <a:fontRef idx="minor">
+            <a:schemeClr val="tx1"/>
+          </a:fontRef>
+        </p:style>
+      </p:cxnSp>
+      <p:sp>
+        <p:nvSpPr>
+          <p:cNvPr id="14" name="TextBox 13">
+            <a:extLst>
+              <a:ext uri="{FF2B5EF4-FFF2-40B4-BE49-F238E27FC236}">
+                <a16:creationId xmlns:a16="http://schemas.microsoft.com/office/drawing/2014/main" id="{8D2276FE-7999-D707-5F6C-B6827A158A12}"/>
+              </a:ext>
+            </a:extLst>
+          </p:cNvPr>
+          <p:cNvSpPr txBox="1"/>
+          <p:nvPr/>
+        </p:nvSpPr>
+        <p:spPr>
+          <a:xfrm>
+            <a:off x="7979467" y="171187"/>
+            <a:ext cx="3092723" cy="246221"/>
+          </a:xfrm>
+          <a:prstGeom prst="rect">
+            <a:avLst/>
+          </a:prstGeom>
+          <a:noFill/>
+        </p:spPr>
+        <p:txBody>
+          <a:bodyPr wrap="square" rtlCol="0">
+            <a:spAutoFit/>
+          </a:bodyPr>
+          <a:lstStyle/>
+          <a:p>
+            <a:r>
+              <a:rPr lang="ko-KR" altLang="en-US" sz="1000" b="1" dirty="0">
+                <a:solidFill>
+                  <a:srgbClr val="0000FF"/>
+                </a:solidFill>
+              </a:rPr>
+              <a:t>모든 테스트 및 </a:t>
+            </a:r>
+            <a:r>
+              <a:rPr lang="ko-KR" altLang="en-US" sz="1000" b="1" dirty="0" err="1">
+                <a:solidFill>
+                  <a:srgbClr val="0000FF"/>
+                </a:solidFill>
+              </a:rPr>
+              <a:t>노멀모드</a:t>
+            </a:r>
+            <a:r>
+              <a:rPr lang="ko-KR" altLang="en-US" sz="1000" b="1" dirty="0">
+                <a:solidFill>
+                  <a:srgbClr val="0000FF"/>
+                </a:solidFill>
+              </a:rPr>
+              <a:t> 에서 </a:t>
+            </a:r>
+            <a:r>
+              <a:rPr lang="en-US" altLang="ko-KR" sz="1000" b="1" dirty="0">
+                <a:solidFill>
+                  <a:srgbClr val="0000FF"/>
+                </a:solidFill>
+              </a:rPr>
+              <a:t>0x20 : 3F </a:t>
+            </a:r>
+            <a:r>
+              <a:rPr lang="ko-KR" altLang="en-US" sz="1000" b="1" dirty="0">
+                <a:solidFill>
+                  <a:srgbClr val="0000FF"/>
+                </a:solidFill>
+              </a:rPr>
+              <a:t>입력</a:t>
+            </a:r>
+          </a:p>
+        </p:txBody>
+      </p:sp>
+      <p:graphicFrame>
+        <p:nvGraphicFramePr>
+          <p:cNvPr id="7" name="표 6">
+            <a:extLst>
+              <a:ext uri="{FF2B5EF4-FFF2-40B4-BE49-F238E27FC236}">
+                <a16:creationId xmlns:a16="http://schemas.microsoft.com/office/drawing/2014/main" id="{A5AFB446-649C-9E0E-F37E-2F6A1F011754}"/>
+              </a:ext>
+            </a:extLst>
+          </p:cNvPr>
+          <p:cNvGraphicFramePr>
+            <a:graphicFrameLocks noGrp="1"/>
+          </p:cNvGraphicFramePr>
+          <p:nvPr>
+            <p:extLst>
+              <p:ext uri="{D42A27DB-BD31-4B8C-83A1-F6EECF244321}">
+                <p14:modId xmlns:p14="http://schemas.microsoft.com/office/powerpoint/2010/main" val="3161925020"/>
+              </p:ext>
+            </p:extLst>
+          </p:nvPr>
+        </p:nvGraphicFramePr>
+        <p:xfrm>
+          <a:off x="10980420" y="875639"/>
+          <a:ext cx="928206" cy="5330691"/>
+        </p:xfrm>
+        <a:graphic>
+          <a:graphicData uri="http://schemas.openxmlformats.org/drawingml/2006/table">
+            <a:tbl>
+              <a:tblPr firstRow="1" bandRow="1">
+                <a:tableStyleId>{5C22544A-7EE6-4342-B048-85BDC9FD1C3A}</a:tableStyleId>
+              </a:tblPr>
+              <a:tblGrid>
+                <a:gridCol w="928206">
+                  <a:extLst>
+                    <a:ext uri="{9D8B030D-6E8A-4147-A177-3AD203B41FA5}">
+                      <a16:colId xmlns:a16="http://schemas.microsoft.com/office/drawing/2014/main" val="999952988"/>
+                    </a:ext>
+                  </a:extLst>
+                </a:gridCol>
+              </a:tblGrid>
+              <a:tr h="151378">
+                <a:tc>
+                  <a:txBody>
+                    <a:bodyPr/>
+                    <a:lstStyle/>
+                    <a:p>
+                      <a:pPr algn="ctr" latinLnBrk="1"/>
+                      <a:r>
+                        <a:rPr lang="en-US" altLang="ko-KR" sz="700" dirty="0">
+                          <a:solidFill>
+                            <a:schemeClr val="tx1"/>
+                          </a:solidFill>
+                        </a:rPr>
+                        <a:t>0x3F </a:t>
+                      </a:r>
+                      <a:r>
+                        <a:rPr lang="ko-KR" altLang="en-US" sz="700" dirty="0">
+                          <a:solidFill>
+                            <a:schemeClr val="tx1"/>
+                          </a:solidFill>
+                        </a:rPr>
+                        <a:t>번지 값</a:t>
+                      </a:r>
+                    </a:p>
+                  </a:txBody>
+                  <a:tcPr marL="0" marR="0" marT="0" marB="0" anchor="ctr">
+                    <a:lnL w="12700" cap="flat" cmpd="sng" algn="ctr">
+                      <a:solidFill>
+                        <a:schemeClr val="tx1"/>
+                      </a:solidFill>
+                      <a:prstDash val="solid"/>
+                      <a:round/>
+                      <a:headEnd type="none" w="med" len="med"/>
+                      <a:tailEnd type="none" w="med" len="med"/>
+                    </a:lnL>
+                    <a:lnR w="12700" cap="flat" cmpd="sng" algn="ctr">
+                      <a:solidFill>
+                        <a:schemeClr val="tx1"/>
+                      </a:solidFill>
+                      <a:prstDash val="solid"/>
+                      <a:round/>
+                      <a:headEnd type="none" w="med" len="med"/>
+                      <a:tailEnd type="none" w="med" len="med"/>
+                    </a:lnR>
+                    <a:lnT w="12700" cap="flat" cmpd="sng" algn="ctr">
+                      <a:solidFill>
+                        <a:schemeClr val="tx1"/>
+                      </a:solidFill>
+                      <a:prstDash val="solid"/>
+                      <a:round/>
+                      <a:headEnd type="none" w="med" len="med"/>
+                      <a:tailEnd type="none" w="med" len="med"/>
+                    </a:lnT>
+                    <a:lnB w="12700" cap="flat" cmpd="sng" algn="ctr">
+                      <a:solidFill>
+                        <a:schemeClr val="tx1"/>
+                      </a:solidFill>
+                      <a:prstDash val="solid"/>
+                      <a:round/>
+                      <a:headEnd type="none" w="med" len="med"/>
+                      <a:tailEnd type="none" w="med" len="med"/>
+                    </a:lnB>
+                    <a:solidFill>
+                      <a:schemeClr val="bg1"/>
+                    </a:solidFill>
+                  </a:tcPr>
+                </a:tc>
+                <a:extLst>
+                  <a:ext uri="{0D108BD9-81ED-4DB2-BD59-A6C34878D82A}">
+                    <a16:rowId xmlns:a16="http://schemas.microsoft.com/office/drawing/2014/main" val="878763085"/>
+                  </a:ext>
+                </a:extLst>
+              </a:tr>
+              <a:tr h="151378">
+                <a:tc>
+                  <a:txBody>
+                    <a:bodyPr/>
+                    <a:lstStyle/>
+                    <a:p>
+                      <a:pPr algn="ctr" latinLnBrk="1"/>
+                      <a:r>
+                        <a:rPr lang="en-US" altLang="ko-KR" sz="700" dirty="0">
+                          <a:solidFill>
+                            <a:schemeClr val="tx1"/>
+                          </a:solidFill>
+                        </a:rPr>
+                        <a:t>0x800</a:t>
+                      </a:r>
+                      <a:endParaRPr lang="ko-KR" altLang="en-US" sz="700" dirty="0">
+                        <a:solidFill>
+                          <a:schemeClr val="tx1"/>
+                        </a:solidFill>
+                      </a:endParaRPr>
+                    </a:p>
+                  </a:txBody>
+                  <a:tcPr marL="0" marR="0" marT="0" marB="0" anchor="ctr">
+                    <a:lnL w="12700" cap="flat" cmpd="sng" algn="ctr">
+                      <a:solidFill>
+                        <a:schemeClr val="tx1"/>
+                      </a:solidFill>
+                      <a:prstDash val="solid"/>
+                      <a:round/>
+                      <a:headEnd type="none" w="med" len="med"/>
+                      <a:tailEnd type="none" w="med" len="med"/>
+                    </a:lnL>
+                    <a:lnR w="12700" cap="flat" cmpd="sng" algn="ctr">
+                      <a:solidFill>
+                        <a:schemeClr val="tx1"/>
+                      </a:solidFill>
+                      <a:prstDash val="solid"/>
+                      <a:round/>
+                      <a:headEnd type="none" w="med" len="med"/>
+                      <a:tailEnd type="none" w="med" len="med"/>
+                    </a:lnR>
+                    <a:lnT w="12700" cap="flat" cmpd="sng" algn="ctr">
+                      <a:solidFill>
+                        <a:schemeClr val="tx1"/>
+                      </a:solidFill>
+                      <a:prstDash val="solid"/>
+                      <a:round/>
+                      <a:headEnd type="none" w="med" len="med"/>
+                      <a:tailEnd type="none" w="med" len="med"/>
+                    </a:lnT>
+                    <a:lnB w="12700" cap="flat" cmpd="sng" algn="ctr">
+                      <a:solidFill>
+                        <a:schemeClr val="tx1"/>
+                      </a:solidFill>
+                      <a:prstDash val="solid"/>
+                      <a:round/>
+                      <a:headEnd type="none" w="med" len="med"/>
+                      <a:tailEnd type="none" w="med" len="med"/>
+                    </a:lnB>
+                    <a:solidFill>
+                      <a:schemeClr val="bg1"/>
+                    </a:solidFill>
+                  </a:tcPr>
+                </a:tc>
+                <a:extLst>
+                  <a:ext uri="{0D108BD9-81ED-4DB2-BD59-A6C34878D82A}">
+                    <a16:rowId xmlns:a16="http://schemas.microsoft.com/office/drawing/2014/main" val="2436749924"/>
+                  </a:ext>
+                </a:extLst>
+              </a:tr>
+              <a:tr h="151378">
+                <a:tc>
+                  <a:txBody>
+                    <a:bodyPr/>
+                    <a:lstStyle/>
+                    <a:p>
+                      <a:pPr algn="ctr" latinLnBrk="1"/>
+                      <a:r>
+                        <a:rPr lang="en-US" altLang="ko-KR" sz="700" dirty="0">
+                          <a:solidFill>
+                            <a:schemeClr val="tx1"/>
+                          </a:solidFill>
+                        </a:rPr>
+                        <a:t>0x900</a:t>
+                      </a:r>
+                      <a:endParaRPr lang="ko-KR" altLang="en-US" sz="700" dirty="0">
+                        <a:solidFill>
+                          <a:schemeClr val="tx1"/>
+                        </a:solidFill>
+                      </a:endParaRPr>
+                    </a:p>
+                  </a:txBody>
+                  <a:tcPr marL="0" marR="0" marT="0" marB="0" anchor="ctr">
+                    <a:lnL w="12700" cap="flat" cmpd="sng" algn="ctr">
+                      <a:solidFill>
+                        <a:schemeClr val="tx1"/>
+                      </a:solidFill>
+                      <a:prstDash val="solid"/>
+                      <a:round/>
+                      <a:headEnd type="none" w="med" len="med"/>
+                      <a:tailEnd type="none" w="med" len="med"/>
+                    </a:lnL>
+                    <a:lnR w="12700" cap="flat" cmpd="sng" algn="ctr">
+                      <a:solidFill>
+                        <a:schemeClr val="tx1"/>
+                      </a:solidFill>
+                      <a:prstDash val="solid"/>
+                      <a:round/>
+                      <a:headEnd type="none" w="med" len="med"/>
+                      <a:tailEnd type="none" w="med" len="med"/>
+                    </a:lnR>
+                    <a:lnT w="12700" cap="flat" cmpd="sng" algn="ctr">
+                      <a:solidFill>
+                        <a:schemeClr val="tx1"/>
+                      </a:solidFill>
+                      <a:prstDash val="solid"/>
+                      <a:round/>
+                      <a:headEnd type="none" w="med" len="med"/>
+                      <a:tailEnd type="none" w="med" len="med"/>
+                    </a:lnT>
+                    <a:lnB w="12700" cap="flat" cmpd="sng" algn="ctr">
+                      <a:solidFill>
+                        <a:schemeClr val="tx1"/>
+                      </a:solidFill>
+                      <a:prstDash val="solid"/>
+                      <a:round/>
+                      <a:headEnd type="none" w="med" len="med"/>
+                      <a:tailEnd type="none" w="med" len="med"/>
+                    </a:lnB>
+                    <a:solidFill>
+                      <a:schemeClr val="bg1"/>
+                    </a:solidFill>
+                  </a:tcPr>
+                </a:tc>
+                <a:extLst>
+                  <a:ext uri="{0D108BD9-81ED-4DB2-BD59-A6C34878D82A}">
+                    <a16:rowId xmlns:a16="http://schemas.microsoft.com/office/drawing/2014/main" val="191029131"/>
+                  </a:ext>
+                </a:extLst>
+              </a:tr>
+              <a:tr h="151378">
+                <a:tc>
+                  <a:txBody>
+                    <a:bodyPr/>
+                    <a:lstStyle/>
+                    <a:p>
+                      <a:pPr algn="ctr" latinLnBrk="1"/>
+                      <a:r>
+                        <a:rPr lang="en-US" altLang="ko-KR" sz="700" dirty="0">
+                          <a:solidFill>
+                            <a:schemeClr val="tx1"/>
+                          </a:solidFill>
+                        </a:rPr>
+                        <a:t>0x900</a:t>
+                      </a:r>
+                      <a:endParaRPr lang="ko-KR" altLang="en-US" sz="700" dirty="0">
+                        <a:solidFill>
+                          <a:schemeClr val="tx1"/>
+                        </a:solidFill>
+                      </a:endParaRPr>
+                    </a:p>
+                  </a:txBody>
+                  <a:tcPr marL="0" marR="0" marT="0" marB="0" anchor="ctr">
+                    <a:lnL w="12700" cap="flat" cmpd="sng" algn="ctr">
+                      <a:solidFill>
+                        <a:schemeClr val="tx1"/>
+                      </a:solidFill>
+                      <a:prstDash val="solid"/>
+                      <a:round/>
+                      <a:headEnd type="none" w="med" len="med"/>
+                      <a:tailEnd type="none" w="med" len="med"/>
+                    </a:lnL>
+                    <a:lnR w="12700" cap="flat" cmpd="sng" algn="ctr">
+                      <a:solidFill>
+                        <a:schemeClr val="tx1"/>
+                      </a:solidFill>
+                      <a:prstDash val="solid"/>
+                      <a:round/>
+                      <a:headEnd type="none" w="med" len="med"/>
+                      <a:tailEnd type="none" w="med" len="med"/>
+                    </a:lnR>
+                    <a:lnT w="12700" cap="flat" cmpd="sng" algn="ctr">
+                      <a:solidFill>
+                        <a:schemeClr val="tx1"/>
+                      </a:solidFill>
+                      <a:prstDash val="solid"/>
+                      <a:round/>
+                      <a:headEnd type="none" w="med" len="med"/>
+                      <a:tailEnd type="none" w="med" len="med"/>
+                    </a:lnT>
+                    <a:lnB w="12700" cap="flat" cmpd="sng" algn="ctr">
+                      <a:solidFill>
+                        <a:schemeClr val="tx1"/>
+                      </a:solidFill>
+                      <a:prstDash val="solid"/>
+                      <a:round/>
+                      <a:headEnd type="none" w="med" len="med"/>
+                      <a:tailEnd type="none" w="med" len="med"/>
+                    </a:lnB>
+                    <a:solidFill>
+                      <a:schemeClr val="bg1"/>
+                    </a:solidFill>
+                  </a:tcPr>
+                </a:tc>
+                <a:extLst>
+                  <a:ext uri="{0D108BD9-81ED-4DB2-BD59-A6C34878D82A}">
+                    <a16:rowId xmlns:a16="http://schemas.microsoft.com/office/drawing/2014/main" val="931140851"/>
+                  </a:ext>
+                </a:extLst>
+              </a:tr>
+              <a:tr h="427381">
+                <a:tc>
+                  <a:txBody>
+                    <a:bodyPr/>
+                    <a:lstStyle/>
+                    <a:p>
+                      <a:pPr algn="ctr" latinLnBrk="1"/>
+                      <a:r>
+                        <a:rPr lang="en-US" altLang="ko-KR" sz="700" dirty="0">
+                          <a:solidFill>
+                            <a:schemeClr val="tx1"/>
+                          </a:solidFill>
+                        </a:rPr>
+                        <a:t>0xB00</a:t>
+                      </a:r>
+                      <a:endParaRPr lang="ko-KR" altLang="en-US" sz="700" dirty="0">
+                        <a:solidFill>
+                          <a:schemeClr val="tx1"/>
+                        </a:solidFill>
+                      </a:endParaRPr>
+                    </a:p>
+                  </a:txBody>
+                  <a:tcPr marL="0" marR="0" marT="0" marB="0" anchor="ctr">
+                    <a:lnL w="12700" cap="flat" cmpd="sng" algn="ctr">
+                      <a:solidFill>
+                        <a:schemeClr val="tx1"/>
+                      </a:solidFill>
+                      <a:prstDash val="solid"/>
+                      <a:round/>
+                      <a:headEnd type="none" w="med" len="med"/>
+                      <a:tailEnd type="none" w="med" len="med"/>
+                    </a:lnL>
+                    <a:lnR w="12700" cap="flat" cmpd="sng" algn="ctr">
+                      <a:solidFill>
+                        <a:schemeClr val="tx1"/>
+                      </a:solidFill>
+                      <a:prstDash val="solid"/>
+                      <a:round/>
+                      <a:headEnd type="none" w="med" len="med"/>
+                      <a:tailEnd type="none" w="med" len="med"/>
+                    </a:lnR>
+                    <a:lnT w="12700" cap="flat" cmpd="sng" algn="ctr">
+                      <a:solidFill>
+                        <a:schemeClr val="tx1"/>
+                      </a:solidFill>
+                      <a:prstDash val="solid"/>
+                      <a:round/>
+                      <a:headEnd type="none" w="med" len="med"/>
+                      <a:tailEnd type="none" w="med" len="med"/>
+                    </a:lnT>
+                    <a:lnB w="12700" cap="flat" cmpd="sng" algn="ctr">
+                      <a:solidFill>
+                        <a:schemeClr val="tx1"/>
+                      </a:solidFill>
+                      <a:prstDash val="solid"/>
+                      <a:round/>
+                      <a:headEnd type="none" w="med" len="med"/>
+                      <a:tailEnd type="none" w="med" len="med"/>
+                    </a:lnB>
+                    <a:solidFill>
+                      <a:schemeClr val="bg1"/>
+                    </a:solidFill>
+                  </a:tcPr>
+                </a:tc>
+                <a:extLst>
+                  <a:ext uri="{0D108BD9-81ED-4DB2-BD59-A6C34878D82A}">
+                    <a16:rowId xmlns:a16="http://schemas.microsoft.com/office/drawing/2014/main" val="3991325891"/>
+                  </a:ext>
+                </a:extLst>
+              </a:tr>
+              <a:tr h="464820">
+                <a:tc>
+                  <a:txBody>
+                    <a:bodyPr/>
+                    <a:lstStyle/>
+                    <a:p>
+                      <a:pPr algn="ctr" latinLnBrk="1"/>
+                      <a:r>
+                        <a:rPr lang="en-US" altLang="ko-KR" sz="700" dirty="0">
+                          <a:solidFill>
+                            <a:schemeClr val="tx1"/>
+                          </a:solidFill>
+                        </a:rPr>
+                        <a:t>0xC00</a:t>
+                      </a:r>
+                      <a:endParaRPr lang="ko-KR" altLang="en-US" sz="700" dirty="0">
+                        <a:solidFill>
+                          <a:schemeClr val="tx1"/>
+                        </a:solidFill>
+                      </a:endParaRPr>
+                    </a:p>
+                  </a:txBody>
+                  <a:tcPr marL="0" marR="0" marT="0" marB="0" anchor="ctr">
+                    <a:lnL w="12700" cap="flat" cmpd="sng" algn="ctr">
+                      <a:solidFill>
+                        <a:schemeClr val="tx1"/>
+                      </a:solidFill>
+                      <a:prstDash val="solid"/>
+                      <a:round/>
+                      <a:headEnd type="none" w="med" len="med"/>
+                      <a:tailEnd type="none" w="med" len="med"/>
+                    </a:lnL>
+                    <a:lnR w="12700" cap="flat" cmpd="sng" algn="ctr">
+                      <a:solidFill>
+                        <a:schemeClr val="tx1"/>
+                      </a:solidFill>
+                      <a:prstDash val="solid"/>
+                      <a:round/>
+                      <a:headEnd type="none" w="med" len="med"/>
+                      <a:tailEnd type="none" w="med" len="med"/>
+                    </a:lnR>
+                    <a:lnT w="12700" cap="flat" cmpd="sng" algn="ctr">
+                      <a:solidFill>
+                        <a:schemeClr val="tx1"/>
+                      </a:solidFill>
+                      <a:prstDash val="solid"/>
+                      <a:round/>
+                      <a:headEnd type="none" w="med" len="med"/>
+                      <a:tailEnd type="none" w="med" len="med"/>
+                    </a:lnT>
+                    <a:lnB w="12700" cap="flat" cmpd="sng" algn="ctr">
+                      <a:solidFill>
+                        <a:schemeClr val="tx1"/>
+                      </a:solidFill>
+                      <a:prstDash val="solid"/>
+                      <a:round/>
+                      <a:headEnd type="none" w="med" len="med"/>
+                      <a:tailEnd type="none" w="med" len="med"/>
+                    </a:lnB>
+                    <a:solidFill>
+                      <a:schemeClr val="bg1"/>
+                    </a:solidFill>
+                  </a:tcPr>
+                </a:tc>
+                <a:extLst>
+                  <a:ext uri="{0D108BD9-81ED-4DB2-BD59-A6C34878D82A}">
+                    <a16:rowId xmlns:a16="http://schemas.microsoft.com/office/drawing/2014/main" val="2115664181"/>
+                  </a:ext>
+                </a:extLst>
+              </a:tr>
+              <a:tr h="151378">
+                <a:tc>
+                  <a:txBody>
+                    <a:bodyPr/>
+                    <a:lstStyle/>
+                    <a:p>
+                      <a:pPr algn="ctr" latinLnBrk="1"/>
+                      <a:r>
+                        <a:rPr lang="en-US" altLang="ko-KR" sz="700" dirty="0">
+                          <a:solidFill>
+                            <a:schemeClr val="tx1"/>
+                          </a:solidFill>
+                        </a:rPr>
+                        <a:t>0xD00</a:t>
+                      </a:r>
+                      <a:endParaRPr lang="ko-KR" altLang="en-US" sz="700" dirty="0">
+                        <a:solidFill>
+                          <a:schemeClr val="tx1"/>
+                        </a:solidFill>
+                      </a:endParaRPr>
+                    </a:p>
+                  </a:txBody>
+                  <a:tcPr marL="0" marR="0" marT="0" marB="0" anchor="ctr">
+                    <a:lnL w="12700" cap="flat" cmpd="sng" algn="ctr">
+                      <a:solidFill>
+                        <a:schemeClr val="tx1"/>
+                      </a:solidFill>
+                      <a:prstDash val="solid"/>
+                      <a:round/>
+                      <a:headEnd type="none" w="med" len="med"/>
+                      <a:tailEnd type="none" w="med" len="med"/>
+                    </a:lnL>
+                    <a:lnR w="12700" cap="flat" cmpd="sng" algn="ctr">
+                      <a:solidFill>
+                        <a:schemeClr val="tx1"/>
+                      </a:solidFill>
+                      <a:prstDash val="solid"/>
+                      <a:round/>
+                      <a:headEnd type="none" w="med" len="med"/>
+                      <a:tailEnd type="none" w="med" len="med"/>
+                    </a:lnR>
+                    <a:lnT w="12700" cap="flat" cmpd="sng" algn="ctr">
+                      <a:solidFill>
+                        <a:schemeClr val="tx1"/>
+                      </a:solidFill>
+                      <a:prstDash val="solid"/>
+                      <a:round/>
+                      <a:headEnd type="none" w="med" len="med"/>
+                      <a:tailEnd type="none" w="med" len="med"/>
+                    </a:lnT>
+                    <a:lnB w="12700" cap="flat" cmpd="sng" algn="ctr">
+                      <a:solidFill>
+                        <a:schemeClr val="tx1"/>
+                      </a:solidFill>
+                      <a:prstDash val="solid"/>
+                      <a:round/>
+                      <a:headEnd type="none" w="med" len="med"/>
+                      <a:tailEnd type="none" w="med" len="med"/>
+                    </a:lnB>
+                    <a:solidFill>
+                      <a:schemeClr val="bg1"/>
+                    </a:solidFill>
+                  </a:tcPr>
+                </a:tc>
+                <a:extLst>
+                  <a:ext uri="{0D108BD9-81ED-4DB2-BD59-A6C34878D82A}">
+                    <a16:rowId xmlns:a16="http://schemas.microsoft.com/office/drawing/2014/main" val="1454523439"/>
+                  </a:ext>
+                </a:extLst>
+              </a:tr>
+              <a:tr h="601980">
+                <a:tc>
+                  <a:txBody>
+                    <a:bodyPr/>
+                    <a:lstStyle/>
+                    <a:p>
+                      <a:pPr algn="ctr" latinLnBrk="1"/>
+                      <a:r>
+                        <a:rPr lang="en-US" altLang="ko-KR" sz="700" dirty="0">
+                          <a:solidFill>
+                            <a:schemeClr val="tx1"/>
+                          </a:solidFill>
+                        </a:rPr>
+                        <a:t>0x810</a:t>
+                      </a:r>
+                      <a:endParaRPr lang="ko-KR" altLang="en-US" sz="700" dirty="0">
+                        <a:solidFill>
+                          <a:schemeClr val="tx1"/>
+                        </a:solidFill>
+                      </a:endParaRPr>
+                    </a:p>
+                  </a:txBody>
+                  <a:tcPr marL="0" marR="0" marT="0" marB="0" anchor="ctr">
+                    <a:lnL w="12700" cap="flat" cmpd="sng" algn="ctr">
+                      <a:solidFill>
+                        <a:schemeClr val="tx1"/>
+                      </a:solidFill>
+                      <a:prstDash val="solid"/>
+                      <a:round/>
+                      <a:headEnd type="none" w="med" len="med"/>
+                      <a:tailEnd type="none" w="med" len="med"/>
+                    </a:lnL>
+                    <a:lnR w="12700" cap="flat" cmpd="sng" algn="ctr">
+                      <a:solidFill>
+                        <a:schemeClr val="tx1"/>
+                      </a:solidFill>
+                      <a:prstDash val="solid"/>
+                      <a:round/>
+                      <a:headEnd type="none" w="med" len="med"/>
+                      <a:tailEnd type="none" w="med" len="med"/>
+                    </a:lnR>
+                    <a:lnT w="12700" cap="flat" cmpd="sng" algn="ctr">
+                      <a:solidFill>
+                        <a:schemeClr val="tx1"/>
+                      </a:solidFill>
+                      <a:prstDash val="solid"/>
+                      <a:round/>
+                      <a:headEnd type="none" w="med" len="med"/>
+                      <a:tailEnd type="none" w="med" len="med"/>
+                    </a:lnT>
+                    <a:lnB w="12700" cap="flat" cmpd="sng" algn="ctr">
+                      <a:solidFill>
+                        <a:schemeClr val="tx1"/>
+                      </a:solidFill>
+                      <a:prstDash val="solid"/>
+                      <a:round/>
+                      <a:headEnd type="none" w="med" len="med"/>
+                      <a:tailEnd type="none" w="med" len="med"/>
+                    </a:lnB>
+                    <a:solidFill>
+                      <a:schemeClr val="bg1"/>
+                    </a:solidFill>
+                  </a:tcPr>
+                </a:tc>
+                <a:extLst>
+                  <a:ext uri="{0D108BD9-81ED-4DB2-BD59-A6C34878D82A}">
+                    <a16:rowId xmlns:a16="http://schemas.microsoft.com/office/drawing/2014/main" val="2476688234"/>
+                  </a:ext>
+                </a:extLst>
+              </a:tr>
+              <a:tr h="1531620">
+                <a:tc>
+                  <a:txBody>
+                    <a:bodyPr/>
+                    <a:lstStyle/>
+                    <a:p>
+                      <a:pPr algn="ctr" latinLnBrk="1"/>
+                      <a:r>
+                        <a:rPr lang="en-US" altLang="ko-KR" sz="700" dirty="0">
+                          <a:solidFill>
+                            <a:schemeClr val="tx1"/>
+                          </a:solidFill>
+                        </a:rPr>
+                        <a:t>0x820</a:t>
+                      </a:r>
+                      <a:endParaRPr lang="ko-KR" altLang="en-US" sz="700" dirty="0">
+                        <a:solidFill>
+                          <a:schemeClr val="tx1"/>
+                        </a:solidFill>
+                      </a:endParaRPr>
+                    </a:p>
+                  </a:txBody>
+                  <a:tcPr marL="0" marR="0" marT="0" marB="0" anchor="ctr">
+                    <a:lnL w="12700" cap="flat" cmpd="sng" algn="ctr">
+                      <a:solidFill>
+                        <a:schemeClr val="tx1"/>
+                      </a:solidFill>
+                      <a:prstDash val="solid"/>
+                      <a:round/>
+                      <a:headEnd type="none" w="med" len="med"/>
+                      <a:tailEnd type="none" w="med" len="med"/>
+                    </a:lnL>
+                    <a:lnR w="12700" cap="flat" cmpd="sng" algn="ctr">
+                      <a:solidFill>
+                        <a:schemeClr val="tx1"/>
+                      </a:solidFill>
+                      <a:prstDash val="solid"/>
+                      <a:round/>
+                      <a:headEnd type="none" w="med" len="med"/>
+                      <a:tailEnd type="none" w="med" len="med"/>
+                    </a:lnR>
+                    <a:lnT w="12700" cap="flat" cmpd="sng" algn="ctr">
+                      <a:solidFill>
+                        <a:schemeClr val="tx1"/>
+                      </a:solidFill>
+                      <a:prstDash val="solid"/>
+                      <a:round/>
+                      <a:headEnd type="none" w="med" len="med"/>
+                      <a:tailEnd type="none" w="med" len="med"/>
+                    </a:lnT>
+                    <a:lnB w="12700" cap="flat" cmpd="sng" algn="ctr">
+                      <a:solidFill>
+                        <a:schemeClr val="tx1"/>
+                      </a:solidFill>
+                      <a:prstDash val="solid"/>
+                      <a:round/>
+                      <a:headEnd type="none" w="med" len="med"/>
+                      <a:tailEnd type="none" w="med" len="med"/>
+                    </a:lnB>
+                    <a:solidFill>
+                      <a:schemeClr val="bg1"/>
+                    </a:solidFill>
+                  </a:tcPr>
+                </a:tc>
+                <a:extLst>
+                  <a:ext uri="{0D108BD9-81ED-4DB2-BD59-A6C34878D82A}">
+                    <a16:rowId xmlns:a16="http://schemas.microsoft.com/office/drawing/2014/main" val="2101419065"/>
+                  </a:ext>
+                </a:extLst>
+              </a:tr>
+              <a:tr h="1548000">
+                <a:tc>
+                  <a:txBody>
+                    <a:bodyPr/>
+                    <a:lstStyle/>
+                    <a:p>
+                      <a:pPr algn="ctr" latinLnBrk="1"/>
+                      <a:r>
+                        <a:rPr lang="en-US" altLang="ko-KR" sz="700" dirty="0">
+                          <a:solidFill>
+                            <a:schemeClr val="tx1"/>
+                          </a:solidFill>
+                        </a:rPr>
+                        <a:t>0x820</a:t>
+                      </a:r>
+                      <a:endParaRPr lang="ko-KR" altLang="en-US" sz="700" dirty="0">
+                        <a:solidFill>
+                          <a:schemeClr val="tx1"/>
+                        </a:solidFill>
+                      </a:endParaRPr>
+                    </a:p>
+                  </a:txBody>
+                  <a:tcPr marL="0" marR="0" marT="0" marB="0" anchor="ctr">
+                    <a:lnL w="12700" cap="flat" cmpd="sng" algn="ctr">
+                      <a:solidFill>
+                        <a:schemeClr val="tx1"/>
+                      </a:solidFill>
+                      <a:prstDash val="solid"/>
+                      <a:round/>
+                      <a:headEnd type="none" w="med" len="med"/>
+                      <a:tailEnd type="none" w="med" len="med"/>
+                    </a:lnL>
+                    <a:lnR w="12700" cap="flat" cmpd="sng" algn="ctr">
+                      <a:solidFill>
+                        <a:schemeClr val="tx1"/>
+                      </a:solidFill>
+                      <a:prstDash val="solid"/>
+                      <a:round/>
+                      <a:headEnd type="none" w="med" len="med"/>
+                      <a:tailEnd type="none" w="med" len="med"/>
+                    </a:lnR>
+                    <a:lnT w="12700" cap="flat" cmpd="sng" algn="ctr">
+                      <a:solidFill>
+                        <a:schemeClr val="tx1"/>
+                      </a:solidFill>
+                      <a:prstDash val="solid"/>
+                      <a:round/>
+                      <a:headEnd type="none" w="med" len="med"/>
+                      <a:tailEnd type="none" w="med" len="med"/>
+                    </a:lnT>
+                    <a:lnB w="12700" cap="flat" cmpd="sng" algn="ctr">
+                      <a:solidFill>
+                        <a:schemeClr val="tx1"/>
+                      </a:solidFill>
+                      <a:prstDash val="solid"/>
+                      <a:round/>
+                      <a:headEnd type="none" w="med" len="med"/>
+                      <a:tailEnd type="none" w="med" len="med"/>
+                    </a:lnB>
+                    <a:solidFill>
+                      <a:schemeClr val="bg1"/>
+                    </a:solidFill>
+                  </a:tcPr>
+                </a:tc>
+                <a:extLst>
+                  <a:ext uri="{0D108BD9-81ED-4DB2-BD59-A6C34878D82A}">
+                    <a16:rowId xmlns:a16="http://schemas.microsoft.com/office/drawing/2014/main" val="1790766824"/>
+                  </a:ext>
+                </a:extLst>
+              </a:tr>
+            </a:tbl>
+          </a:graphicData>
+        </a:graphic>
+      </p:graphicFrame>
+      <p:sp>
+        <p:nvSpPr>
+          <p:cNvPr id="8" name="TextBox 7">
+            <a:extLst>
+              <a:ext uri="{FF2B5EF4-FFF2-40B4-BE49-F238E27FC236}">
+                <a16:creationId xmlns:a16="http://schemas.microsoft.com/office/drawing/2014/main" id="{024E8536-24E1-AE42-DA5D-4F6F9BFB0BD9}"/>
+              </a:ext>
+            </a:extLst>
+          </p:cNvPr>
+          <p:cNvSpPr txBox="1"/>
+          <p:nvPr/>
+        </p:nvSpPr>
+        <p:spPr>
+          <a:xfrm>
+            <a:off x="3762375" y="2533650"/>
+            <a:ext cx="1257300" cy="492443"/>
+          </a:xfrm>
+          <a:prstGeom prst="rect">
+            <a:avLst/>
+          </a:prstGeom>
+          <a:noFill/>
+        </p:spPr>
+        <p:txBody>
+          <a:bodyPr wrap="square" lIns="0" tIns="0" rIns="0" bIns="0" rtlCol="0">
+            <a:spAutoFit/>
+          </a:bodyPr>
+          <a:lstStyle/>
+          <a:p>
+            <a:r>
+              <a:rPr lang="ko-KR" altLang="en-US" sz="800" b="1" dirty="0">
+                <a:solidFill>
+                  <a:srgbClr val="0000FF"/>
+                </a:solidFill>
+              </a:rPr>
+              <a:t>좌측 레지스터 셋팅 후 </a:t>
+            </a:r>
+            <a:endParaRPr lang="en-US" altLang="ko-KR" sz="800" b="1" dirty="0">
+              <a:solidFill>
+                <a:srgbClr val="0000FF"/>
+              </a:solidFill>
+            </a:endParaRPr>
+          </a:p>
+          <a:p>
+            <a:r>
+              <a:rPr lang="en-US" altLang="ko-KR" sz="800" b="1" dirty="0">
+                <a:solidFill>
+                  <a:srgbClr val="0000FF"/>
+                </a:solidFill>
+              </a:rPr>
+              <a:t>8.333ms</a:t>
+            </a:r>
+            <a:r>
+              <a:rPr lang="ko-KR" altLang="en-US" sz="800" b="1" dirty="0">
+                <a:solidFill>
+                  <a:srgbClr val="0000FF"/>
+                </a:solidFill>
+              </a:rPr>
+              <a:t> 간격으로</a:t>
+            </a:r>
+            <a:endParaRPr lang="en-US" altLang="ko-KR" sz="800" b="1" dirty="0">
+              <a:solidFill>
+                <a:srgbClr val="0000FF"/>
+              </a:solidFill>
+            </a:endParaRPr>
+          </a:p>
+          <a:p>
+            <a:r>
+              <a:rPr lang="en-US" altLang="ko-KR" sz="800" b="1" dirty="0" err="1">
+                <a:solidFill>
+                  <a:srgbClr val="0000FF"/>
+                </a:solidFill>
+              </a:rPr>
+              <a:t>Vsync</a:t>
+            </a:r>
+            <a:r>
+              <a:rPr lang="en-US" altLang="ko-KR" sz="800" b="1" dirty="0">
+                <a:solidFill>
+                  <a:srgbClr val="0000FF"/>
+                </a:solidFill>
+              </a:rPr>
+              <a:t> Command </a:t>
+            </a:r>
+          </a:p>
+          <a:p>
+            <a:r>
+              <a:rPr lang="en-US" altLang="ko-KR" sz="800" b="1" dirty="0">
+                <a:solidFill>
+                  <a:srgbClr val="0000FF"/>
+                </a:solidFill>
+              </a:rPr>
+              <a:t>120</a:t>
+            </a:r>
+            <a:r>
+              <a:rPr lang="ko-KR" altLang="en-US" sz="800" b="1" dirty="0">
+                <a:solidFill>
+                  <a:srgbClr val="0000FF"/>
+                </a:solidFill>
+              </a:rPr>
+              <a:t>회 전달 후 주파수 측정</a:t>
+            </a:r>
+          </a:p>
+        </p:txBody>
+      </p:sp>
+    </p:spTree>
+    <p:extLst>
+      <p:ext uri="{BB962C8B-B14F-4D97-AF65-F5344CB8AC3E}">
+        <p14:creationId xmlns:p14="http://schemas.microsoft.com/office/powerpoint/2010/main" val="480297099"/>
+      </p:ext>
+    </p:extLst>
+  </p:cSld>
+  <p:clrMapOvr>
+    <a:masterClrMapping/>
+  </p:clrMapOvr>
+</p:sld>
+</file>
+
+<file path=ppt/slides/slide11.xml><?xml version="1.0" encoding="utf-8"?>
+<p:sld xmlns:a="http://schemas.openxmlformats.org/drawingml/2006/main" xmlns:r="http://schemas.openxmlformats.org/officeDocument/2006/relationships" xmlns:p="http://schemas.openxmlformats.org/presentationml/2006/main">
+  <p:cSld>
+    <p:spTree>
+      <p:nvGrpSpPr>
+        <p:cNvPr id="1" name=""/>
+        <p:cNvGrpSpPr/>
+        <p:nvPr/>
+      </p:nvGrpSpPr>
+      <p:grpSpPr>
+        <a:xfrm>
+          <a:off x="0" y="0"/>
+          <a:ext cx="0" cy="0"/>
+          <a:chOff x="0" y="0"/>
+          <a:chExt cx="0" cy="0"/>
+        </a:xfrm>
+      </p:grpSpPr>
+      <p:sp>
+        <p:nvSpPr>
+          <p:cNvPr id="11" name="TextBox 10">
+            <a:extLst>
+              <a:ext uri="{FF2B5EF4-FFF2-40B4-BE49-F238E27FC236}">
+                <a16:creationId xmlns:a16="http://schemas.microsoft.com/office/drawing/2014/main" id="{7588DDAE-A1CC-CDA8-E64B-BC6B6F9374F7}"/>
+              </a:ext>
+            </a:extLst>
+          </p:cNvPr>
+          <p:cNvSpPr txBox="1"/>
+          <p:nvPr/>
+        </p:nvSpPr>
+        <p:spPr>
+          <a:xfrm>
+            <a:off x="274320" y="506306"/>
+            <a:ext cx="3846196" cy="369332"/>
+          </a:xfrm>
+          <a:prstGeom prst="rect">
+            <a:avLst/>
+          </a:prstGeom>
+          <a:noFill/>
+        </p:spPr>
+        <p:txBody>
+          <a:bodyPr wrap="square" rtlCol="0">
+            <a:spAutoFit/>
+          </a:bodyPr>
+          <a:lstStyle/>
+          <a:p>
+            <a:r>
+              <a:rPr lang="en-US" altLang="ko-KR" dirty="0"/>
+              <a:t>Trimming Sequence</a:t>
+            </a:r>
+            <a:endParaRPr lang="ko-KR" altLang="en-US" dirty="0"/>
+          </a:p>
+        </p:txBody>
+      </p:sp>
+      <p:sp>
+        <p:nvSpPr>
+          <p:cNvPr id="18" name="슬라이드 번호 개체 틀 17">
+            <a:extLst>
+              <a:ext uri="{FF2B5EF4-FFF2-40B4-BE49-F238E27FC236}">
+                <a16:creationId xmlns:a16="http://schemas.microsoft.com/office/drawing/2014/main" id="{878A8905-3DC8-FB5F-8DA7-11DB88E9374A}"/>
+              </a:ext>
+            </a:extLst>
+          </p:cNvPr>
+          <p:cNvSpPr>
+            <a:spLocks noGrp="1"/>
+          </p:cNvSpPr>
+          <p:nvPr>
+            <p:ph type="sldNum" sz="quarter" idx="4"/>
+          </p:nvPr>
+        </p:nvSpPr>
+        <p:spPr/>
+        <p:txBody>
+          <a:bodyPr/>
+          <a:lstStyle/>
+          <a:p>
+            <a:fld id="{83D7C3DD-38B7-4D6D-B394-0849C77A12EC}" type="slidenum">
+              <a:rPr lang="en-US" smtClean="0"/>
+              <a:pPr/>
+              <a:t>11</a:t>
+            </a:fld>
+            <a:endParaRPr lang="en-US" dirty="0"/>
+          </a:p>
+        </p:txBody>
+      </p:sp>
+      <p:pic>
+        <p:nvPicPr>
+          <p:cNvPr id="4" name="그림 3" descr="텍스트, 스크린샷, 번호, 평행이(가) 표시된 사진&#10;&#10;AI 생성 콘텐츠는 정확하지 않을 수 있습니다.">
+            <a:extLst>
+              <a:ext uri="{FF2B5EF4-FFF2-40B4-BE49-F238E27FC236}">
+                <a16:creationId xmlns:a16="http://schemas.microsoft.com/office/drawing/2014/main" id="{17DB58A8-2F91-D4E5-8678-ADFD287DE9A5}"/>
+              </a:ext>
+            </a:extLst>
+          </p:cNvPr>
+          <p:cNvPicPr>
+            <a:picLocks noChangeAspect="1"/>
+          </p:cNvPicPr>
+          <p:nvPr/>
+        </p:nvPicPr>
+        <p:blipFill>
+          <a:blip r:embed="rId2"/>
+          <a:stretch>
+            <a:fillRect/>
+          </a:stretch>
+        </p:blipFill>
+        <p:spPr>
+          <a:xfrm>
+            <a:off x="1029653" y="855326"/>
+            <a:ext cx="10132694" cy="5496368"/>
+          </a:xfrm>
+          <a:prstGeom prst="rect">
+            <a:avLst/>
+          </a:prstGeom>
+        </p:spPr>
+      </p:pic>
+      <p:sp>
+        <p:nvSpPr>
+          <p:cNvPr id="2" name="TextBox 1">
+            <a:extLst>
+              <a:ext uri="{FF2B5EF4-FFF2-40B4-BE49-F238E27FC236}">
+                <a16:creationId xmlns:a16="http://schemas.microsoft.com/office/drawing/2014/main" id="{4006312E-2542-C3C0-F50B-620D5CD5F9C7}"/>
+              </a:ext>
+            </a:extLst>
+          </p:cNvPr>
+          <p:cNvSpPr txBox="1"/>
+          <p:nvPr/>
+        </p:nvSpPr>
+        <p:spPr>
+          <a:xfrm>
+            <a:off x="9942774" y="1441406"/>
+            <a:ext cx="1351548" cy="215444"/>
+          </a:xfrm>
+          <a:prstGeom prst="rect">
+            <a:avLst/>
+          </a:prstGeom>
+          <a:noFill/>
+        </p:spPr>
+        <p:txBody>
+          <a:bodyPr wrap="square" rtlCol="0">
+            <a:spAutoFit/>
+          </a:bodyPr>
+          <a:lstStyle/>
+          <a:p>
+            <a:r>
+              <a:rPr lang="en-US" altLang="ko-KR" sz="800" b="1" dirty="0">
+                <a:solidFill>
+                  <a:srgbClr val="0000FF"/>
+                </a:solidFill>
+              </a:rPr>
+              <a:t>**signed binary**</a:t>
+            </a:r>
+            <a:endParaRPr lang="ko-KR" altLang="en-US" sz="800" b="1" dirty="0">
+              <a:solidFill>
+                <a:srgbClr val="0000FF"/>
+              </a:solidFill>
+            </a:endParaRPr>
+          </a:p>
+        </p:txBody>
+      </p:sp>
+      <p:sp>
+        <p:nvSpPr>
+          <p:cNvPr id="3" name="TextBox 2">
+            <a:extLst>
+              <a:ext uri="{FF2B5EF4-FFF2-40B4-BE49-F238E27FC236}">
+                <a16:creationId xmlns:a16="http://schemas.microsoft.com/office/drawing/2014/main" id="{33ECF950-B0D9-179B-90D5-76E2C733DF08}"/>
+              </a:ext>
+            </a:extLst>
+          </p:cNvPr>
+          <p:cNvSpPr txBox="1"/>
+          <p:nvPr/>
+        </p:nvSpPr>
+        <p:spPr>
+          <a:xfrm>
+            <a:off x="9933343" y="1577943"/>
+            <a:ext cx="1351548" cy="215444"/>
+          </a:xfrm>
+          <a:prstGeom prst="rect">
+            <a:avLst/>
+          </a:prstGeom>
+          <a:noFill/>
+        </p:spPr>
+        <p:txBody>
+          <a:bodyPr wrap="square" rtlCol="0">
+            <a:spAutoFit/>
+          </a:bodyPr>
+          <a:lstStyle/>
+          <a:p>
+            <a:r>
+              <a:rPr lang="en-US" altLang="ko-KR" sz="800" b="1" dirty="0">
+                <a:solidFill>
+                  <a:srgbClr val="0000FF"/>
+                </a:solidFill>
+              </a:rPr>
+              <a:t>**signed binary**</a:t>
+            </a:r>
+            <a:endParaRPr lang="ko-KR" altLang="en-US" sz="800" b="1" dirty="0">
+              <a:solidFill>
+                <a:srgbClr val="0000FF"/>
+              </a:solidFill>
+            </a:endParaRPr>
+          </a:p>
+        </p:txBody>
+      </p:sp>
+      <p:cxnSp>
+        <p:nvCxnSpPr>
+          <p:cNvPr id="5" name="직선 연결선 4">
+            <a:extLst>
+              <a:ext uri="{FF2B5EF4-FFF2-40B4-BE49-F238E27FC236}">
+                <a16:creationId xmlns:a16="http://schemas.microsoft.com/office/drawing/2014/main" id="{8FFCC792-08EA-2FFC-DEA3-2DFE247275DF}"/>
+              </a:ext>
+            </a:extLst>
+          </p:cNvPr>
+          <p:cNvCxnSpPr/>
+          <p:nvPr/>
+        </p:nvCxnSpPr>
+        <p:spPr>
+          <a:xfrm>
+            <a:off x="7086986" y="5805234"/>
+            <a:ext cx="245097" cy="0"/>
+          </a:xfrm>
+          <a:prstGeom prst="line">
+            <a:avLst/>
+          </a:prstGeom>
+          <a:ln>
+            <a:solidFill>
+              <a:srgbClr val="0000FF"/>
+            </a:solidFill>
+          </a:ln>
+        </p:spPr>
+        <p:style>
+          <a:lnRef idx="2">
+            <a:schemeClr val="accent1"/>
+          </a:lnRef>
+          <a:fillRef idx="0">
+            <a:schemeClr val="accent1"/>
+          </a:fillRef>
+          <a:effectRef idx="1">
+            <a:schemeClr val="accent1"/>
+          </a:effectRef>
+          <a:fontRef idx="minor">
+            <a:schemeClr val="tx1"/>
+          </a:fontRef>
+        </p:style>
+      </p:cxnSp>
+      <p:sp>
+        <p:nvSpPr>
+          <p:cNvPr id="6" name="TextBox 5">
+            <a:extLst>
+              <a:ext uri="{FF2B5EF4-FFF2-40B4-BE49-F238E27FC236}">
+                <a16:creationId xmlns:a16="http://schemas.microsoft.com/office/drawing/2014/main" id="{62939007-AD1D-8A34-62F1-56D82EC941E2}"/>
+              </a:ext>
+            </a:extLst>
+          </p:cNvPr>
+          <p:cNvSpPr txBox="1"/>
+          <p:nvPr/>
+        </p:nvSpPr>
+        <p:spPr>
+          <a:xfrm>
+            <a:off x="7109940" y="5549138"/>
+            <a:ext cx="444285" cy="246221"/>
+          </a:xfrm>
+          <a:prstGeom prst="rect">
+            <a:avLst/>
+          </a:prstGeom>
+          <a:noFill/>
+        </p:spPr>
+        <p:txBody>
+          <a:bodyPr wrap="square" rtlCol="0">
+            <a:spAutoFit/>
+          </a:bodyPr>
+          <a:lstStyle/>
+          <a:p>
+            <a:r>
+              <a:rPr lang="en-US" altLang="ko-KR" sz="1000" b="1" dirty="0">
+                <a:solidFill>
+                  <a:srgbClr val="0000FF"/>
+                </a:solidFill>
+              </a:rPr>
+              <a:t>3’d3</a:t>
+            </a:r>
+            <a:endParaRPr lang="ko-KR" altLang="en-US" sz="1000" b="1" dirty="0">
+              <a:solidFill>
+                <a:srgbClr val="0000FF"/>
+              </a:solidFill>
+            </a:endParaRPr>
+          </a:p>
+        </p:txBody>
+      </p:sp>
+      <p:cxnSp>
+        <p:nvCxnSpPr>
+          <p:cNvPr id="7" name="직선 연결선 6">
+            <a:extLst>
+              <a:ext uri="{FF2B5EF4-FFF2-40B4-BE49-F238E27FC236}">
+                <a16:creationId xmlns:a16="http://schemas.microsoft.com/office/drawing/2014/main" id="{C1DF24C4-BA86-F86D-F9C2-8C04047CF99F}"/>
+              </a:ext>
+            </a:extLst>
+          </p:cNvPr>
+          <p:cNvCxnSpPr/>
+          <p:nvPr/>
+        </p:nvCxnSpPr>
+        <p:spPr>
+          <a:xfrm>
+            <a:off x="10561189" y="5806810"/>
+            <a:ext cx="245097" cy="0"/>
+          </a:xfrm>
+          <a:prstGeom prst="line">
+            <a:avLst/>
+          </a:prstGeom>
+          <a:ln>
+            <a:solidFill>
+              <a:srgbClr val="0000FF"/>
+            </a:solidFill>
+          </a:ln>
+        </p:spPr>
+        <p:style>
+          <a:lnRef idx="2">
+            <a:schemeClr val="accent1"/>
+          </a:lnRef>
+          <a:fillRef idx="0">
+            <a:schemeClr val="accent1"/>
+          </a:fillRef>
+          <a:effectRef idx="1">
+            <a:schemeClr val="accent1"/>
+          </a:effectRef>
+          <a:fontRef idx="minor">
+            <a:schemeClr val="tx1"/>
+          </a:fontRef>
+        </p:style>
+      </p:cxnSp>
+      <p:sp>
+        <p:nvSpPr>
+          <p:cNvPr id="8" name="TextBox 7">
+            <a:extLst>
+              <a:ext uri="{FF2B5EF4-FFF2-40B4-BE49-F238E27FC236}">
+                <a16:creationId xmlns:a16="http://schemas.microsoft.com/office/drawing/2014/main" id="{26266D88-0CEA-A42C-0A12-7D049692B4CE}"/>
+              </a:ext>
+            </a:extLst>
+          </p:cNvPr>
+          <p:cNvSpPr txBox="1"/>
+          <p:nvPr/>
+        </p:nvSpPr>
+        <p:spPr>
+          <a:xfrm>
+            <a:off x="10734744" y="5629212"/>
+            <a:ext cx="605633" cy="246221"/>
+          </a:xfrm>
+          <a:prstGeom prst="rect">
+            <a:avLst/>
+          </a:prstGeom>
+          <a:noFill/>
+        </p:spPr>
+        <p:txBody>
+          <a:bodyPr wrap="square" rtlCol="0">
+            <a:spAutoFit/>
+          </a:bodyPr>
+          <a:lstStyle/>
+          <a:p>
+            <a:r>
+              <a:rPr lang="en-US" altLang="ko-KR" sz="1000" b="1" dirty="0">
+                <a:solidFill>
+                  <a:srgbClr val="0000FF"/>
+                </a:solidFill>
+              </a:rPr>
+              <a:t>0.75V</a:t>
+            </a:r>
+            <a:endParaRPr lang="ko-KR" altLang="en-US" sz="1000" b="1" dirty="0">
+              <a:solidFill>
+                <a:srgbClr val="0000FF"/>
+              </a:solidFill>
+            </a:endParaRPr>
+          </a:p>
+        </p:txBody>
+      </p:sp>
+    </p:spTree>
+    <p:extLst>
+      <p:ext uri="{BB962C8B-B14F-4D97-AF65-F5344CB8AC3E}">
+        <p14:creationId xmlns:p14="http://schemas.microsoft.com/office/powerpoint/2010/main" val="1493675181"/>
+      </p:ext>
+    </p:extLst>
+  </p:cSld>
+  <p:clrMapOvr>
+    <a:masterClrMapping/>
+  </p:clrMapOvr>
+</p:sld>
+</file>
+
+<file path=ppt/slides/slide12.xml><?xml version="1.0" encoding="utf-8"?>
+<p:sld xmlns:a="http://schemas.openxmlformats.org/drawingml/2006/main" xmlns:r="http://schemas.openxmlformats.org/officeDocument/2006/relationships" xmlns:p="http://schemas.openxmlformats.org/presentationml/2006/main">
+  <p:cSld>
+    <p:spTree>
+      <p:nvGrpSpPr>
+        <p:cNvPr id="1" name="">
+          <a:extLst>
+            <a:ext uri="{FF2B5EF4-FFF2-40B4-BE49-F238E27FC236}">
               <a16:creationId xmlns:a16="http://schemas.microsoft.com/office/drawing/2014/main" id="{7BAF99BF-765F-0DDA-46D4-F5F03484C427}"/>
             </a:ext>
           </a:extLst>
@@ -4616,7 +6250,7 @@
             <a:fld id="{83D7C3DD-38B7-4D6D-B394-0849C77A12EC}" type="slidenum">
               <a:rPr lang="en-US" smtClean="0"/>
               <a:pPr/>
-              <a:t>10</a:t>
+              <a:t>12</a:t>
             </a:fld>
             <a:endParaRPr lang="en-US" dirty="0"/>
           </a:p>
@@ -4835,7 +6469,7 @@
 </p:sld>
 </file>
 
-<file path=ppt/slides/slide11.xml><?xml version="1.0" encoding="utf-8"?>
+<file path=ppt/slides/slide13.xml><?xml version="1.0" encoding="utf-8"?>
 <p:sld xmlns:a="http://schemas.openxmlformats.org/drawingml/2006/main" xmlns:r="http://schemas.openxmlformats.org/officeDocument/2006/relationships" xmlns:p="http://schemas.openxmlformats.org/presentationml/2006/main">
   <p:cSld>
     <p:spTree>
@@ -4926,7 +6560,7 @@
             <a:fld id="{83D7C3DD-38B7-4D6D-B394-0849C77A12EC}" type="slidenum">
               <a:rPr lang="en-US" smtClean="0"/>
               <a:pPr/>
-              <a:t>11</a:t>
+              <a:t>13</a:t>
             </a:fld>
             <a:endParaRPr lang="en-US" dirty="0"/>
           </a:p>
@@ -4975,7 +6609,7 @@
 </p:sld>
 </file>
 
-<file path=ppt/slides/slide12.xml><?xml version="1.0" encoding="utf-8"?>
+<file path=ppt/slides/slide14.xml><?xml version="1.0" encoding="utf-8"?>
 <p:sld xmlns:a="http://schemas.openxmlformats.org/drawingml/2006/main" xmlns:r="http://schemas.openxmlformats.org/officeDocument/2006/relationships" xmlns:p="http://schemas.openxmlformats.org/presentationml/2006/main">
   <p:cSld>
     <p:spTree>
@@ -5052,7 +6686,7 @@
             <a:fld id="{83D7C3DD-38B7-4D6D-B394-0849C77A12EC}" type="slidenum">
               <a:rPr lang="en-US" smtClean="0"/>
               <a:pPr/>
-              <a:t>12</a:t>
+              <a:t>14</a:t>
             </a:fld>
             <a:endParaRPr lang="en-US" dirty="0"/>
           </a:p>
@@ -5101,7 +6735,7 @@
 </p:sld>
 </file>
 
-<file path=ppt/slides/slide13.xml><?xml version="1.0" encoding="utf-8"?>
+<file path=ppt/slides/slide15.xml><?xml version="1.0" encoding="utf-8"?>
 <p:sld xmlns:a="http://schemas.openxmlformats.org/drawingml/2006/main" xmlns:r="http://schemas.openxmlformats.org/officeDocument/2006/relationships" xmlns:p="http://schemas.openxmlformats.org/presentationml/2006/main">
   <p:cSld>
     <p:spTree>
@@ -5184,7 +6818,7 @@
             <a:fld id="{83D7C3DD-38B7-4D6D-B394-0849C77A12EC}" type="slidenum">
               <a:rPr lang="en-US" smtClean="0"/>
               <a:pPr/>
-              <a:t>13</a:t>
+              <a:t>15</a:t>
             </a:fld>
             <a:endParaRPr lang="en-US" dirty="0"/>
           </a:p>
@@ -6470,7 +8104,7 @@
         <p:cNvPr id="1" name="">
           <a:extLst>
             <a:ext uri="{FF2B5EF4-FFF2-40B4-BE49-F238E27FC236}">
-              <a16:creationId xmlns:a16="http://schemas.microsoft.com/office/drawing/2014/main" id="{C114B90A-1680-386D-0CBD-F2A32E2AC307}"/>
+              <a16:creationId xmlns:a16="http://schemas.microsoft.com/office/drawing/2014/main" id="{62299F81-C892-9C5A-D7E6-D011E1398734}"/>
             </a:ext>
           </a:extLst>
         </p:cNvPr>
@@ -6487,10 +8121,75 @@
       </p:grpSpPr>
       <p:sp>
         <p:nvSpPr>
-          <p:cNvPr id="11" name="TextBox 10">
-            <a:extLst>
-              <a:ext uri="{FF2B5EF4-FFF2-40B4-BE49-F238E27FC236}">
-                <a16:creationId xmlns:a16="http://schemas.microsoft.com/office/drawing/2014/main" id="{D667DCAA-308B-2430-64B8-D503B37D88A5}"/>
+          <p:cNvPr id="2" name="슬라이드 번호 개체 틀 1">
+            <a:extLst>
+              <a:ext uri="{FF2B5EF4-FFF2-40B4-BE49-F238E27FC236}">
+                <a16:creationId xmlns:a16="http://schemas.microsoft.com/office/drawing/2014/main" id="{AA108D5C-2B7C-86AA-F7C3-A3730AAB7FC6}"/>
+              </a:ext>
+            </a:extLst>
+          </p:cNvPr>
+          <p:cNvSpPr>
+            <a:spLocks noGrp="1"/>
+          </p:cNvSpPr>
+          <p:nvPr>
+            <p:ph type="sldNum" sz="quarter" idx="4"/>
+          </p:nvPr>
+        </p:nvSpPr>
+        <p:spPr/>
+        <p:txBody>
+          <a:bodyPr/>
+          <a:lstStyle/>
+          <a:p>
+            <a:fld id="{83D7C3DD-38B7-4D6D-B394-0849C77A12EC}" type="slidenum">
+              <a:rPr lang="en-US" smtClean="0"/>
+              <a:pPr/>
+              <a:t>8</a:t>
+            </a:fld>
+            <a:endParaRPr lang="en-US" dirty="0"/>
+          </a:p>
+        </p:txBody>
+      </p:sp>
+      <p:pic>
+        <p:nvPicPr>
+          <p:cNvPr id="4" name="그림 3">
+            <a:extLst>
+              <a:ext uri="{FF2B5EF4-FFF2-40B4-BE49-F238E27FC236}">
+                <a16:creationId xmlns:a16="http://schemas.microsoft.com/office/drawing/2014/main" id="{E4330D71-8CA3-40B5-4E5D-F935B293956A}"/>
+              </a:ext>
+            </a:extLst>
+          </p:cNvPr>
+          <p:cNvPicPr>
+            <a:picLocks noChangeAspect="1"/>
+          </p:cNvPicPr>
+          <p:nvPr/>
+        </p:nvPicPr>
+        <p:blipFill>
+          <a:blip r:embed="rId2">
+            <a:extLst>
+              <a:ext uri="{28A0092B-C50C-407E-A947-70E740481C1C}">
+                <a14:useLocalDpi xmlns:a14="http://schemas.microsoft.com/office/drawing/2010/main" val="0"/>
+              </a:ext>
+            </a:extLst>
+          </a:blip>
+          <a:srcRect/>
+          <a:stretch/>
+        </p:blipFill>
+        <p:spPr>
+          <a:xfrm>
+            <a:off x="985837" y="884626"/>
+            <a:ext cx="10220325" cy="5279248"/>
+          </a:xfrm>
+          <a:prstGeom prst="rect">
+            <a:avLst/>
+          </a:prstGeom>
+        </p:spPr>
+      </p:pic>
+      <p:sp>
+        <p:nvSpPr>
+          <p:cNvPr id="5" name="TextBox 4">
+            <a:extLst>
+              <a:ext uri="{FF2B5EF4-FFF2-40B4-BE49-F238E27FC236}">
+                <a16:creationId xmlns:a16="http://schemas.microsoft.com/office/drawing/2014/main" id="{F4144633-932F-C3F9-F741-38AC40157E3F}"/>
               </a:ext>
             </a:extLst>
           </p:cNvPr>
@@ -6515,306 +8214,24 @@
           <a:p>
             <a:r>
               <a:rPr lang="en-US" altLang="ko-KR" dirty="0"/>
-              <a:t>Trimming Sequence</a:t>
+              <a:t>Trim Initial</a:t>
+            </a:r>
+            <a:r>
+              <a:rPr lang="ko-KR" altLang="en-US" dirty="0"/>
+              <a:t> </a:t>
+            </a:r>
+            <a:r>
+              <a:rPr lang="en-US" altLang="ko-KR" dirty="0"/>
+              <a:t>Setting</a:t>
             </a:r>
             <a:endParaRPr lang="ko-KR" altLang="en-US" dirty="0"/>
-          </a:p>
-        </p:txBody>
-      </p:sp>
-      <p:sp>
-        <p:nvSpPr>
-          <p:cNvPr id="18" name="슬라이드 번호 개체 틀 17">
-            <a:extLst>
-              <a:ext uri="{FF2B5EF4-FFF2-40B4-BE49-F238E27FC236}">
-                <a16:creationId xmlns:a16="http://schemas.microsoft.com/office/drawing/2014/main" id="{334BF372-9BBA-6ED9-D2BC-2E525BDE1AB1}"/>
-              </a:ext>
-            </a:extLst>
-          </p:cNvPr>
-          <p:cNvSpPr>
-            <a:spLocks noGrp="1"/>
-          </p:cNvSpPr>
-          <p:nvPr>
-            <p:ph type="sldNum" sz="quarter" idx="4"/>
-          </p:nvPr>
-        </p:nvSpPr>
-        <p:spPr/>
-        <p:txBody>
-          <a:bodyPr/>
-          <a:lstStyle/>
-          <a:p>
-            <a:fld id="{83D7C3DD-38B7-4D6D-B394-0849C77A12EC}" type="slidenum">
-              <a:rPr lang="en-US" smtClean="0"/>
-              <a:pPr/>
-              <a:t>8</a:t>
-            </a:fld>
-            <a:endParaRPr lang="en-US" dirty="0"/>
-          </a:p>
-        </p:txBody>
-      </p:sp>
-      <p:pic>
-        <p:nvPicPr>
-          <p:cNvPr id="3" name="그림 2" descr="텍스트, 스크린샷, 번호, 평행이(가) 표시된 사진&#10;&#10;AI 생성 콘텐츠는 정확하지 않을 수 있습니다.">
-            <a:extLst>
-              <a:ext uri="{FF2B5EF4-FFF2-40B4-BE49-F238E27FC236}">
-                <a16:creationId xmlns:a16="http://schemas.microsoft.com/office/drawing/2014/main" id="{62E483F5-D3FF-7963-BE09-CCDB7711BB4A}"/>
-              </a:ext>
-            </a:extLst>
-          </p:cNvPr>
-          <p:cNvPicPr>
-            <a:picLocks noChangeAspect="1"/>
-          </p:cNvPicPr>
-          <p:nvPr/>
-        </p:nvPicPr>
-        <p:blipFill>
-          <a:blip r:embed="rId3"/>
-          <a:stretch>
-            <a:fillRect/>
-          </a:stretch>
-        </p:blipFill>
-        <p:spPr>
-          <a:xfrm>
-            <a:off x="329565" y="849671"/>
-            <a:ext cx="11532870" cy="5502023"/>
-          </a:xfrm>
-          <a:prstGeom prst="rect">
-            <a:avLst/>
-          </a:prstGeom>
-        </p:spPr>
-      </p:pic>
-      <p:sp>
-        <p:nvSpPr>
-          <p:cNvPr id="2" name="TextBox 1">
-            <a:extLst>
-              <a:ext uri="{FF2B5EF4-FFF2-40B4-BE49-F238E27FC236}">
-                <a16:creationId xmlns:a16="http://schemas.microsoft.com/office/drawing/2014/main" id="{36A1965B-383C-1548-3223-84F85CD1BDFB}"/>
-              </a:ext>
-            </a:extLst>
-          </p:cNvPr>
-          <p:cNvSpPr txBox="1"/>
-          <p:nvPr/>
-        </p:nvSpPr>
-        <p:spPr>
-          <a:xfrm>
-            <a:off x="10386394" y="1559240"/>
-            <a:ext cx="1351548" cy="246221"/>
-          </a:xfrm>
-          <a:prstGeom prst="rect">
-            <a:avLst/>
-          </a:prstGeom>
-          <a:noFill/>
-        </p:spPr>
-        <p:txBody>
-          <a:bodyPr wrap="square" rtlCol="0">
-            <a:spAutoFit/>
-          </a:bodyPr>
-          <a:lstStyle/>
-          <a:p>
-            <a:r>
-              <a:rPr lang="en-US" altLang="ko-KR" sz="1000" b="1" dirty="0">
-                <a:solidFill>
-                  <a:srgbClr val="0000FF"/>
-                </a:solidFill>
-              </a:rPr>
-              <a:t>**signed binary**</a:t>
-            </a:r>
-            <a:endParaRPr lang="ko-KR" altLang="en-US" sz="1000" b="1" dirty="0">
-              <a:solidFill>
-                <a:srgbClr val="0000FF"/>
-              </a:solidFill>
-            </a:endParaRPr>
-          </a:p>
-        </p:txBody>
-      </p:sp>
-      <p:sp>
-        <p:nvSpPr>
-          <p:cNvPr id="4" name="TextBox 3">
-            <a:extLst>
-              <a:ext uri="{FF2B5EF4-FFF2-40B4-BE49-F238E27FC236}">
-                <a16:creationId xmlns:a16="http://schemas.microsoft.com/office/drawing/2014/main" id="{7A860B47-43A0-8F15-62BE-2196D3377AF2}"/>
-              </a:ext>
-            </a:extLst>
-          </p:cNvPr>
-          <p:cNvSpPr txBox="1"/>
-          <p:nvPr/>
-        </p:nvSpPr>
-        <p:spPr>
-          <a:xfrm>
-            <a:off x="10386394" y="2039855"/>
-            <a:ext cx="1351548" cy="246221"/>
-          </a:xfrm>
-          <a:prstGeom prst="rect">
-            <a:avLst/>
-          </a:prstGeom>
-          <a:noFill/>
-        </p:spPr>
-        <p:txBody>
-          <a:bodyPr wrap="square" rtlCol="0">
-            <a:spAutoFit/>
-          </a:bodyPr>
-          <a:lstStyle/>
-          <a:p>
-            <a:r>
-              <a:rPr lang="en-US" altLang="ko-KR" sz="1000" b="1" dirty="0">
-                <a:solidFill>
-                  <a:srgbClr val="0000FF"/>
-                </a:solidFill>
-              </a:rPr>
-              <a:t>**signed binary**</a:t>
-            </a:r>
-            <a:endParaRPr lang="ko-KR" altLang="en-US" sz="1000" b="1" dirty="0">
-              <a:solidFill>
-                <a:srgbClr val="0000FF"/>
-              </a:solidFill>
-            </a:endParaRPr>
-          </a:p>
-        </p:txBody>
-      </p:sp>
-      <p:pic>
-        <p:nvPicPr>
-          <p:cNvPr id="9" name="그림 8">
-            <a:extLst>
-              <a:ext uri="{FF2B5EF4-FFF2-40B4-BE49-F238E27FC236}">
-                <a16:creationId xmlns:a16="http://schemas.microsoft.com/office/drawing/2014/main" id="{DA0B8689-7E8F-BEE8-365E-55A0FCC0F06B}"/>
-              </a:ext>
-            </a:extLst>
-          </p:cNvPr>
-          <p:cNvPicPr>
-            <a:picLocks noChangeAspect="1"/>
-          </p:cNvPicPr>
-          <p:nvPr/>
-        </p:nvPicPr>
-        <p:blipFill>
-          <a:blip r:embed="rId4"/>
-          <a:stretch>
-            <a:fillRect/>
-          </a:stretch>
-        </p:blipFill>
-        <p:spPr>
-          <a:xfrm>
-            <a:off x="2960496" y="574731"/>
-            <a:ext cx="7867400" cy="175673"/>
-          </a:xfrm>
-          <a:prstGeom prst="rect">
-            <a:avLst/>
-          </a:prstGeom>
-        </p:spPr>
-      </p:pic>
-      <p:cxnSp>
-        <p:nvCxnSpPr>
-          <p:cNvPr id="12" name="직선 화살표 연결선 11">
-            <a:extLst>
-              <a:ext uri="{FF2B5EF4-FFF2-40B4-BE49-F238E27FC236}">
-                <a16:creationId xmlns:a16="http://schemas.microsoft.com/office/drawing/2014/main" id="{414ADA60-0A8A-3B3B-BB7E-315ACAF16D5A}"/>
-              </a:ext>
-            </a:extLst>
-          </p:cNvPr>
-          <p:cNvCxnSpPr>
-            <a:cxnSpLocks/>
-          </p:cNvCxnSpPr>
-          <p:nvPr/>
-        </p:nvCxnSpPr>
-        <p:spPr>
-          <a:xfrm flipH="1">
-            <a:off x="7618343" y="323022"/>
-            <a:ext cx="318053" cy="251709"/>
-          </a:xfrm>
-          <a:prstGeom prst="straightConnector1">
-            <a:avLst/>
-          </a:prstGeom>
-          <a:ln>
-            <a:tailEnd type="triangle"/>
-          </a:ln>
-        </p:spPr>
-        <p:style>
-          <a:lnRef idx="2">
-            <a:schemeClr val="accent1"/>
-          </a:lnRef>
-          <a:fillRef idx="0">
-            <a:schemeClr val="accent1"/>
-          </a:fillRef>
-          <a:effectRef idx="1">
-            <a:schemeClr val="accent1"/>
-          </a:effectRef>
-          <a:fontRef idx="minor">
-            <a:schemeClr val="tx1"/>
-          </a:fontRef>
-        </p:style>
-      </p:cxnSp>
-      <p:sp>
-        <p:nvSpPr>
-          <p:cNvPr id="14" name="TextBox 13">
-            <a:extLst>
-              <a:ext uri="{FF2B5EF4-FFF2-40B4-BE49-F238E27FC236}">
-                <a16:creationId xmlns:a16="http://schemas.microsoft.com/office/drawing/2014/main" id="{8D2276FE-7999-D707-5F6C-B6827A158A12}"/>
-              </a:ext>
-            </a:extLst>
-          </p:cNvPr>
-          <p:cNvSpPr txBox="1"/>
-          <p:nvPr/>
-        </p:nvSpPr>
-        <p:spPr>
-          <a:xfrm>
-            <a:off x="7979467" y="171187"/>
-            <a:ext cx="3092723" cy="246221"/>
-          </a:xfrm>
-          <a:prstGeom prst="rect">
-            <a:avLst/>
-          </a:prstGeom>
-          <a:noFill/>
-        </p:spPr>
-        <p:txBody>
-          <a:bodyPr wrap="square" rtlCol="0">
-            <a:spAutoFit/>
-          </a:bodyPr>
-          <a:lstStyle/>
-          <a:p>
-            <a:r>
-              <a:rPr lang="ko-KR" altLang="en-US" sz="1000" b="1" dirty="0">
-                <a:solidFill>
-                  <a:srgbClr val="0000FF"/>
-                </a:solidFill>
-              </a:rPr>
-              <a:t>모든 테스트 및 </a:t>
-            </a:r>
-            <a:r>
-              <a:rPr lang="ko-KR" altLang="en-US" sz="1000" b="1" dirty="0" err="1">
-                <a:solidFill>
-                  <a:srgbClr val="0000FF"/>
-                </a:solidFill>
-              </a:rPr>
-              <a:t>노멀모드</a:t>
-            </a:r>
-            <a:r>
-              <a:rPr lang="ko-KR" altLang="en-US" sz="1000" b="1" dirty="0">
-                <a:solidFill>
-                  <a:srgbClr val="0000FF"/>
-                </a:solidFill>
-              </a:rPr>
-              <a:t> 에서 </a:t>
-            </a:r>
-            <a:r>
-              <a:rPr lang="en-US" altLang="ko-KR" sz="1000" b="1" dirty="0">
-                <a:solidFill>
-                  <a:srgbClr val="0000FF"/>
-                </a:solidFill>
-              </a:rPr>
-              <a:t>0x20 : 3F </a:t>
-            </a:r>
-            <a:r>
-              <a:rPr lang="ko-KR" altLang="en-US" sz="1000" b="1" dirty="0">
-                <a:solidFill>
-                  <a:srgbClr val="0000FF"/>
-                </a:solidFill>
-              </a:rPr>
-              <a:t>입력</a:t>
-            </a:r>
           </a:p>
         </p:txBody>
       </p:sp>
     </p:spTree>
     <p:extLst>
       <p:ext uri="{BB962C8B-B14F-4D97-AF65-F5344CB8AC3E}">
-        <p14:creationId xmlns:p14="http://schemas.microsoft.com/office/powerpoint/2010/main" val="480297099"/>
+        <p14:creationId xmlns:p14="http://schemas.microsoft.com/office/powerpoint/2010/main" val="3433677837"/>
       </p:ext>
     </p:extLst>
   </p:cSld>
@@ -6829,7 +8246,13 @@
   <p:cSld>
     <p:spTree>
       <p:nvGrpSpPr>
-        <p:cNvPr id="1" name=""/>
+        <p:cNvPr id="1" name="">
+          <a:extLst>
+            <a:ext uri="{FF2B5EF4-FFF2-40B4-BE49-F238E27FC236}">
+              <a16:creationId xmlns:a16="http://schemas.microsoft.com/office/drawing/2014/main" id="{B4260C1A-1443-EBFD-D17A-0071042801B4}"/>
+            </a:ext>
+          </a:extLst>
+        </p:cNvPr>
         <p:cNvGrpSpPr/>
         <p:nvPr/>
       </p:nvGrpSpPr>
@@ -6843,10 +8266,40 @@
       </p:grpSpPr>
       <p:sp>
         <p:nvSpPr>
-          <p:cNvPr id="11" name="TextBox 10">
-            <a:extLst>
-              <a:ext uri="{FF2B5EF4-FFF2-40B4-BE49-F238E27FC236}">
-                <a16:creationId xmlns:a16="http://schemas.microsoft.com/office/drawing/2014/main" id="{7588DDAE-A1CC-CDA8-E64B-BC6B6F9374F7}"/>
+          <p:cNvPr id="2" name="슬라이드 번호 개체 틀 1">
+            <a:extLst>
+              <a:ext uri="{FF2B5EF4-FFF2-40B4-BE49-F238E27FC236}">
+                <a16:creationId xmlns:a16="http://schemas.microsoft.com/office/drawing/2014/main" id="{3DC38721-1FFE-D032-E46F-D86A9FD3CDBF}"/>
+              </a:ext>
+            </a:extLst>
+          </p:cNvPr>
+          <p:cNvSpPr>
+            <a:spLocks noGrp="1"/>
+          </p:cNvSpPr>
+          <p:nvPr>
+            <p:ph type="sldNum" sz="quarter" idx="4"/>
+          </p:nvPr>
+        </p:nvSpPr>
+        <p:spPr/>
+        <p:txBody>
+          <a:bodyPr/>
+          <a:lstStyle/>
+          <a:p>
+            <a:fld id="{83D7C3DD-38B7-4D6D-B394-0849C77A12EC}" type="slidenum">
+              <a:rPr lang="en-US" smtClean="0"/>
+              <a:pPr/>
+              <a:t>9</a:t>
+            </a:fld>
+            <a:endParaRPr lang="en-US" dirty="0"/>
+          </a:p>
+        </p:txBody>
+      </p:sp>
+      <p:sp>
+        <p:nvSpPr>
+          <p:cNvPr id="5" name="TextBox 4">
+            <a:extLst>
+              <a:ext uri="{FF2B5EF4-FFF2-40B4-BE49-F238E27FC236}">
+                <a16:creationId xmlns:a16="http://schemas.microsoft.com/office/drawing/2014/main" id="{EB37CEF0-BE04-9007-2027-3A98B0FE0AF5}"/>
               </a:ext>
             </a:extLst>
           </p:cNvPr>
@@ -6870,49 +8323,31 @@
           <a:lstStyle/>
           <a:p>
             <a:r>
+              <a:rPr lang="ko-KR" altLang="en-US" dirty="0"/>
+              <a:t>레지스터  </a:t>
+            </a:r>
+            <a:r>
               <a:rPr lang="en-US" altLang="ko-KR" dirty="0"/>
-              <a:t>Trimming Sequence</a:t>
+              <a:t>Write </a:t>
+            </a:r>
+            <a:r>
+              <a:rPr lang="ko-KR" altLang="en-US" dirty="0"/>
+              <a:t>시 유의 사항</a:t>
+            </a:r>
+            <a:r>
+              <a:rPr lang="en-US" altLang="ko-KR" dirty="0"/>
+              <a:t>!!</a:t>
             </a:r>
             <a:endParaRPr lang="ko-KR" altLang="en-US" dirty="0"/>
-          </a:p>
-        </p:txBody>
-      </p:sp>
-      <p:sp>
-        <p:nvSpPr>
-          <p:cNvPr id="18" name="슬라이드 번호 개체 틀 17">
-            <a:extLst>
-              <a:ext uri="{FF2B5EF4-FFF2-40B4-BE49-F238E27FC236}">
-                <a16:creationId xmlns:a16="http://schemas.microsoft.com/office/drawing/2014/main" id="{878A8905-3DC8-FB5F-8DA7-11DB88E9374A}"/>
-              </a:ext>
-            </a:extLst>
-          </p:cNvPr>
-          <p:cNvSpPr>
-            <a:spLocks noGrp="1"/>
-          </p:cNvSpPr>
-          <p:nvPr>
-            <p:ph type="sldNum" sz="quarter" idx="4"/>
-          </p:nvPr>
-        </p:nvSpPr>
-        <p:spPr/>
-        <p:txBody>
-          <a:bodyPr/>
-          <a:lstStyle/>
-          <a:p>
-            <a:fld id="{83D7C3DD-38B7-4D6D-B394-0849C77A12EC}" type="slidenum">
-              <a:rPr lang="en-US" smtClean="0"/>
-              <a:pPr/>
-              <a:t>9</a:t>
-            </a:fld>
-            <a:endParaRPr lang="en-US" dirty="0"/>
           </a:p>
         </p:txBody>
       </p:sp>
       <p:pic>
         <p:nvPicPr>
-          <p:cNvPr id="4" name="그림 3" descr="텍스트, 스크린샷, 번호, 평행이(가) 표시된 사진&#10;&#10;AI 생성 콘텐츠는 정확하지 않을 수 있습니다.">
-            <a:extLst>
-              <a:ext uri="{FF2B5EF4-FFF2-40B4-BE49-F238E27FC236}">
-                <a16:creationId xmlns:a16="http://schemas.microsoft.com/office/drawing/2014/main" id="{17DB58A8-2F91-D4E5-8678-ADFD287DE9A5}"/>
+          <p:cNvPr id="6" name="그림 5" descr="텍스트, 스크린샷, 폰트, 영수증이(가) 표시된 사진&#10;&#10;AI 생성 콘텐츠는 정확하지 않을 수 있습니다.">
+            <a:extLst>
+              <a:ext uri="{FF2B5EF4-FFF2-40B4-BE49-F238E27FC236}">
+                <a16:creationId xmlns:a16="http://schemas.microsoft.com/office/drawing/2014/main" id="{66931C8B-A38A-B11F-3354-754BE7C69F4A}"/>
               </a:ext>
             </a:extLst>
           </p:cNvPr>
@@ -6929,20 +8364,50 @@
         </p:blipFill>
         <p:spPr>
           <a:xfrm>
-            <a:off x="1029653" y="855326"/>
-            <a:ext cx="10132694" cy="5496368"/>
+            <a:off x="274320" y="875638"/>
+            <a:ext cx="6249272" cy="2048161"/>
           </a:xfrm>
           <a:prstGeom prst="rect">
             <a:avLst/>
           </a:prstGeom>
         </p:spPr>
       </p:pic>
-      <p:sp>
-        <p:nvSpPr>
-          <p:cNvPr id="2" name="TextBox 1">
-            <a:extLst>
-              <a:ext uri="{FF2B5EF4-FFF2-40B4-BE49-F238E27FC236}">
-                <a16:creationId xmlns:a16="http://schemas.microsoft.com/office/drawing/2014/main" id="{4006312E-2542-C3C0-F50B-620D5CD5F9C7}"/>
+      <p:pic>
+        <p:nvPicPr>
+          <p:cNvPr id="8" name="그림 7">
+            <a:extLst>
+              <a:ext uri="{FF2B5EF4-FFF2-40B4-BE49-F238E27FC236}">
+                <a16:creationId xmlns:a16="http://schemas.microsoft.com/office/drawing/2014/main" id="{8FE14B94-4429-0EA2-F358-CD240129AD42}"/>
+              </a:ext>
+            </a:extLst>
+          </p:cNvPr>
+          <p:cNvPicPr>
+            <a:picLocks noChangeAspect="1"/>
+          </p:cNvPicPr>
+          <p:nvPr/>
+        </p:nvPicPr>
+        <p:blipFill>
+          <a:blip r:embed="rId3"/>
+          <a:stretch>
+            <a:fillRect/>
+          </a:stretch>
+        </p:blipFill>
+        <p:spPr>
+          <a:xfrm>
+            <a:off x="274320" y="3293131"/>
+            <a:ext cx="5410200" cy="1250950"/>
+          </a:xfrm>
+          <a:prstGeom prst="rect">
+            <a:avLst/>
+          </a:prstGeom>
+        </p:spPr>
+      </p:pic>
+      <p:sp>
+        <p:nvSpPr>
+          <p:cNvPr id="9" name="TextBox 8">
+            <a:extLst>
+              <a:ext uri="{FF2B5EF4-FFF2-40B4-BE49-F238E27FC236}">
+                <a16:creationId xmlns:a16="http://schemas.microsoft.com/office/drawing/2014/main" id="{7BF6DAC9-5C98-17C0-2E13-0D485EC93B31}"/>
               </a:ext>
             </a:extLst>
           </p:cNvPr>
@@ -6951,8 +8416,8 @@
         </p:nvSpPr>
         <p:spPr>
           <a:xfrm>
-            <a:off x="9942774" y="1441406"/>
-            <a:ext cx="1351548" cy="215444"/>
+            <a:off x="514350" y="4566496"/>
+            <a:ext cx="9299790" cy="369332"/>
           </a:xfrm>
           <a:prstGeom prst="rect">
             <a:avLst/>
@@ -6960,236 +8425,110 @@
           <a:noFill/>
         </p:spPr>
         <p:txBody>
-          <a:bodyPr wrap="square" rtlCol="0">
+          <a:bodyPr wrap="none" rtlCol="0">
             <a:spAutoFit/>
           </a:bodyPr>
           <a:lstStyle/>
           <a:p>
             <a:r>
-              <a:rPr lang="en-US" altLang="ko-KR" sz="800" b="1" dirty="0">
+              <a:rPr lang="en-US" altLang="ko-KR" b="1" dirty="0" err="1">
                 <a:solidFill>
-                  <a:srgbClr val="0000FF"/>
+                  <a:srgbClr val="FF0000"/>
                 </a:solidFill>
               </a:rPr>
-              <a:t>**signed binary**</a:t>
-            </a:r>
-            <a:endParaRPr lang="ko-KR" altLang="en-US" sz="800" b="1" dirty="0">
-              <a:solidFill>
-                <a:srgbClr val="0000FF"/>
-              </a:solidFill>
-            </a:endParaRPr>
-          </a:p>
-        </p:txBody>
-      </p:sp>
-      <p:sp>
-        <p:nvSpPr>
-          <p:cNvPr id="3" name="TextBox 2">
-            <a:extLst>
-              <a:ext uri="{FF2B5EF4-FFF2-40B4-BE49-F238E27FC236}">
-                <a16:creationId xmlns:a16="http://schemas.microsoft.com/office/drawing/2014/main" id="{33ECF950-B0D9-179B-90D5-76E2C733DF08}"/>
-              </a:ext>
-            </a:extLst>
-          </p:cNvPr>
-          <p:cNvSpPr txBox="1"/>
-          <p:nvPr/>
-        </p:nvSpPr>
-        <p:spPr>
-          <a:xfrm>
-            <a:off x="9933343" y="1577943"/>
-            <a:ext cx="1351548" cy="215444"/>
-          </a:xfrm>
-          <a:prstGeom prst="rect">
-            <a:avLst/>
-          </a:prstGeom>
-          <a:noFill/>
-        </p:spPr>
-        <p:txBody>
-          <a:bodyPr wrap="square" rtlCol="0">
-            <a:spAutoFit/>
-          </a:bodyPr>
-          <a:lstStyle/>
-          <a:p>
-            <a:r>
-              <a:rPr lang="en-US" altLang="ko-KR" sz="800" b="1" dirty="0">
+              <a:t>WR_Protect</a:t>
+            </a:r>
+            <a:r>
+              <a:rPr lang="en-US" altLang="ko-KR" b="1" dirty="0">
                 <a:solidFill>
-                  <a:srgbClr val="0000FF"/>
+                  <a:srgbClr val="FF0000"/>
                 </a:solidFill>
               </a:rPr>
-              <a:t>**signed binary**</a:t>
-            </a:r>
-            <a:endParaRPr lang="ko-KR" altLang="en-US" sz="800" b="1" dirty="0">
-              <a:solidFill>
-                <a:srgbClr val="0000FF"/>
-              </a:solidFill>
-            </a:endParaRPr>
-          </a:p>
-        </p:txBody>
-      </p:sp>
-      <p:cxnSp>
-        <p:nvCxnSpPr>
-          <p:cNvPr id="5" name="직선 연결선 4">
-            <a:extLst>
-              <a:ext uri="{FF2B5EF4-FFF2-40B4-BE49-F238E27FC236}">
-                <a16:creationId xmlns:a16="http://schemas.microsoft.com/office/drawing/2014/main" id="{8FFCC792-08EA-2FFC-DEA3-2DFE247275DF}"/>
-              </a:ext>
-            </a:extLst>
-          </p:cNvPr>
-          <p:cNvCxnSpPr/>
-          <p:nvPr/>
-        </p:nvCxnSpPr>
-        <p:spPr>
-          <a:xfrm>
-            <a:off x="7086986" y="5805234"/>
-            <a:ext cx="245097" cy="0"/>
-          </a:xfrm>
-          <a:prstGeom prst="line">
-            <a:avLst/>
-          </a:prstGeom>
-          <a:ln>
-            <a:solidFill>
-              <a:srgbClr val="0000FF"/>
-            </a:solidFill>
-          </a:ln>
-        </p:spPr>
-        <p:style>
-          <a:lnRef idx="2">
-            <a:schemeClr val="accent1"/>
-          </a:lnRef>
-          <a:fillRef idx="0">
-            <a:schemeClr val="accent1"/>
-          </a:fillRef>
-          <a:effectRef idx="1">
-            <a:schemeClr val="accent1"/>
-          </a:effectRef>
-          <a:fontRef idx="minor">
-            <a:schemeClr val="tx1"/>
-          </a:fontRef>
-        </p:style>
-      </p:cxnSp>
-      <p:sp>
-        <p:nvSpPr>
-          <p:cNvPr id="6" name="TextBox 5">
-            <a:extLst>
-              <a:ext uri="{FF2B5EF4-FFF2-40B4-BE49-F238E27FC236}">
-                <a16:creationId xmlns:a16="http://schemas.microsoft.com/office/drawing/2014/main" id="{62939007-AD1D-8A34-62F1-56D82EC941E2}"/>
-              </a:ext>
-            </a:extLst>
-          </p:cNvPr>
-          <p:cNvSpPr txBox="1"/>
-          <p:nvPr/>
-        </p:nvSpPr>
-        <p:spPr>
-          <a:xfrm>
-            <a:off x="7109940" y="5549138"/>
-            <a:ext cx="444285" cy="246221"/>
-          </a:xfrm>
-          <a:prstGeom prst="rect">
-            <a:avLst/>
-          </a:prstGeom>
-          <a:noFill/>
-        </p:spPr>
-        <p:txBody>
-          <a:bodyPr wrap="square" rtlCol="0">
-            <a:spAutoFit/>
-          </a:bodyPr>
-          <a:lstStyle/>
-          <a:p>
-            <a:r>
-              <a:rPr lang="en-US" altLang="ko-KR" sz="1000" b="1" dirty="0">
+              <a:t> </a:t>
+            </a:r>
+            <a:r>
+              <a:rPr lang="ko-KR" altLang="en-US" b="1" dirty="0">
                 <a:solidFill>
-                  <a:srgbClr val="0000FF"/>
+                  <a:srgbClr val="FF0000"/>
                 </a:solidFill>
               </a:rPr>
-              <a:t>3’d3</a:t>
-            </a:r>
-            <a:endParaRPr lang="ko-KR" altLang="en-US" sz="1000" b="1" dirty="0">
-              <a:solidFill>
-                <a:srgbClr val="0000FF"/>
-              </a:solidFill>
-            </a:endParaRPr>
-          </a:p>
-        </p:txBody>
-      </p:sp>
-      <p:cxnSp>
-        <p:nvCxnSpPr>
-          <p:cNvPr id="7" name="직선 연결선 6">
-            <a:extLst>
-              <a:ext uri="{FF2B5EF4-FFF2-40B4-BE49-F238E27FC236}">
-                <a16:creationId xmlns:a16="http://schemas.microsoft.com/office/drawing/2014/main" id="{C1DF24C4-BA86-F86D-F9C2-8C04047CF99F}"/>
-              </a:ext>
-            </a:extLst>
-          </p:cNvPr>
-          <p:cNvCxnSpPr/>
-          <p:nvPr/>
-        </p:nvCxnSpPr>
-        <p:spPr>
-          <a:xfrm>
-            <a:off x="10561189" y="5806810"/>
-            <a:ext cx="245097" cy="0"/>
-          </a:xfrm>
-          <a:prstGeom prst="line">
-            <a:avLst/>
-          </a:prstGeom>
-          <a:ln>
-            <a:solidFill>
-              <a:srgbClr val="0000FF"/>
-            </a:solidFill>
-          </a:ln>
-        </p:spPr>
-        <p:style>
-          <a:lnRef idx="2">
-            <a:schemeClr val="accent1"/>
-          </a:lnRef>
-          <a:fillRef idx="0">
-            <a:schemeClr val="accent1"/>
-          </a:fillRef>
-          <a:effectRef idx="1">
-            <a:schemeClr val="accent1"/>
-          </a:effectRef>
-          <a:fontRef idx="minor">
-            <a:schemeClr val="tx1"/>
-          </a:fontRef>
-        </p:style>
-      </p:cxnSp>
-      <p:sp>
-        <p:nvSpPr>
-          <p:cNvPr id="8" name="TextBox 7">
-            <a:extLst>
-              <a:ext uri="{FF2B5EF4-FFF2-40B4-BE49-F238E27FC236}">
-                <a16:creationId xmlns:a16="http://schemas.microsoft.com/office/drawing/2014/main" id="{26266D88-0CEA-A42C-0A12-7D049692B4CE}"/>
-              </a:ext>
-            </a:extLst>
-          </p:cNvPr>
-          <p:cNvSpPr txBox="1"/>
-          <p:nvPr/>
-        </p:nvSpPr>
-        <p:spPr>
-          <a:xfrm>
-            <a:off x="10734744" y="5629212"/>
-            <a:ext cx="605633" cy="246221"/>
-          </a:xfrm>
-          <a:prstGeom prst="rect">
-            <a:avLst/>
-          </a:prstGeom>
-          <a:noFill/>
-        </p:spPr>
-        <p:txBody>
-          <a:bodyPr wrap="square" rtlCol="0">
-            <a:spAutoFit/>
-          </a:bodyPr>
-          <a:lstStyle/>
-          <a:p>
-            <a:r>
-              <a:rPr lang="en-US" altLang="ko-KR" sz="1000" b="1" dirty="0">
+              <a:t>값이 </a:t>
+            </a:r>
+            <a:r>
+              <a:rPr lang="en-US" altLang="ko-KR" b="1" dirty="0">
                 <a:solidFill>
-                  <a:srgbClr val="0000FF"/>
+                  <a:srgbClr val="FF0000"/>
                 </a:solidFill>
               </a:rPr>
-              <a:t>0.75V</a:t>
-            </a:r>
-            <a:endParaRPr lang="ko-KR" altLang="en-US" sz="1000" b="1" dirty="0">
+              <a:t>0x555</a:t>
+            </a:r>
+            <a:r>
+              <a:rPr lang="ko-KR" altLang="en-US" b="1" dirty="0">
+                <a:solidFill>
+                  <a:srgbClr val="FF0000"/>
+                </a:solidFill>
+              </a:rPr>
+              <a:t>인 경우 </a:t>
+            </a:r>
+            <a:r>
+              <a:rPr lang="en-US" altLang="ko-KR" b="1" dirty="0">
+                <a:solidFill>
+                  <a:srgbClr val="FF0000"/>
+                </a:solidFill>
+              </a:rPr>
+              <a:t>Vref (0x0B, 0x0C, 0x0D</a:t>
+            </a:r>
+            <a:r>
+              <a:rPr lang="ko-KR" altLang="en-US" b="1" dirty="0">
+                <a:solidFill>
+                  <a:srgbClr val="FF0000"/>
+                </a:solidFill>
+              </a:rPr>
+              <a:t>번지</a:t>
+            </a:r>
+            <a:r>
+              <a:rPr lang="en-US" altLang="ko-KR" b="1" dirty="0">
+                <a:solidFill>
+                  <a:srgbClr val="FF0000"/>
+                </a:solidFill>
+              </a:rPr>
+              <a:t>)</a:t>
+            </a:r>
+            <a:r>
+              <a:rPr lang="ko-KR" altLang="en-US" b="1" dirty="0">
+                <a:solidFill>
+                  <a:srgbClr val="FF0000"/>
+                </a:solidFill>
+              </a:rPr>
+              <a:t>에 </a:t>
+            </a:r>
+            <a:r>
+              <a:rPr lang="en-US" altLang="ko-KR" b="1" dirty="0">
+                <a:solidFill>
+                  <a:srgbClr val="FF0000"/>
+                </a:solidFill>
+              </a:rPr>
+              <a:t>Write</a:t>
+            </a:r>
+            <a:r>
+              <a:rPr lang="ko-KR" altLang="en-US" b="1" dirty="0">
+                <a:solidFill>
+                  <a:srgbClr val="FF0000"/>
+                </a:solidFill>
+              </a:rPr>
+              <a:t> 못하는 점 유의</a:t>
+            </a:r>
+            <a:r>
+              <a:rPr lang="en-US" altLang="ko-KR" b="1" dirty="0">
+                <a:solidFill>
+                  <a:srgbClr val="FF0000"/>
+                </a:solidFill>
+              </a:rPr>
+              <a:t>!</a:t>
+            </a:r>
+            <a:endParaRPr lang="ko-KR" altLang="en-US" b="1" dirty="0">
               <a:solidFill>
-                <a:srgbClr val="0000FF"/>
+                <a:srgbClr val="FF0000"/>
               </a:solidFill>
             </a:endParaRPr>
           </a:p>
@@ -7198,7 +8537,7 @@
     </p:spTree>
     <p:extLst>
       <p:ext uri="{BB962C8B-B14F-4D97-AF65-F5344CB8AC3E}">
-        <p14:creationId xmlns:p14="http://schemas.microsoft.com/office/powerpoint/2010/main" val="1493675181"/>
+        <p14:creationId xmlns:p14="http://schemas.microsoft.com/office/powerpoint/2010/main" val="3064123344"/>
       </p:ext>
     </p:extLst>
   </p:cSld>
